--- a/docs/ilyin_pres.pptx
+++ b/docs/ilyin_pres.pptx
@@ -5,7 +5,7 @@
     <p:sldMasterId id="2147483648" r:id="rId1"/>
   </p:sldMasterIdLst>
   <p:notesMasterIdLst>
-    <p:notesMasterId r:id="rId22"/>
+    <p:notesMasterId r:id="rId25"/>
   </p:notesMasterIdLst>
   <p:sldIdLst>
     <p:sldId id="256" r:id="rId2"/>
@@ -17,17 +17,20 @@
     <p:sldId id="262" r:id="rId8"/>
     <p:sldId id="263" r:id="rId9"/>
     <p:sldId id="264" r:id="rId10"/>
-    <p:sldId id="267" r:id="rId11"/>
-    <p:sldId id="265" r:id="rId12"/>
-    <p:sldId id="266" r:id="rId13"/>
-    <p:sldId id="268" r:id="rId14"/>
-    <p:sldId id="271" r:id="rId15"/>
-    <p:sldId id="272" r:id="rId16"/>
-    <p:sldId id="273" r:id="rId17"/>
-    <p:sldId id="274" r:id="rId18"/>
-    <p:sldId id="275" r:id="rId19"/>
-    <p:sldId id="269" r:id="rId20"/>
-    <p:sldId id="270" r:id="rId21"/>
+    <p:sldId id="276" r:id="rId11"/>
+    <p:sldId id="277" r:id="rId12"/>
+    <p:sldId id="278" r:id="rId13"/>
+    <p:sldId id="267" r:id="rId14"/>
+    <p:sldId id="265" r:id="rId15"/>
+    <p:sldId id="266" r:id="rId16"/>
+    <p:sldId id="268" r:id="rId17"/>
+    <p:sldId id="271" r:id="rId18"/>
+    <p:sldId id="272" r:id="rId19"/>
+    <p:sldId id="273" r:id="rId20"/>
+    <p:sldId id="274" r:id="rId21"/>
+    <p:sldId id="275" r:id="rId22"/>
+    <p:sldId id="269" r:id="rId23"/>
+    <p:sldId id="270" r:id="rId24"/>
   </p:sldIdLst>
   <p:sldSz cx="9144000" cy="5143500" type="screen16x9"/>
   <p:notesSz cx="5143500" cy="9144000"/>
@@ -414,7 +417,7 @@
     </p:spTree>
     <p:extLst>
       <p:ext uri="{BB962C8B-B14F-4D97-AF65-F5344CB8AC3E}">
-        <p14:creationId xmlns:p14="http://schemas.microsoft.com/office/powerpoint/2010/main" val="1024086991"/>
+        <p14:creationId xmlns:p14="http://schemas.microsoft.com/office/powerpoint/2010/main" val="2153527345"/>
       </p:ext>
     </p:extLst>
   </p:cSld>
@@ -498,7 +501,7 @@
     </p:spTree>
     <p:extLst>
       <p:ext uri="{BB962C8B-B14F-4D97-AF65-F5344CB8AC3E}">
-        <p14:creationId xmlns:p14="http://schemas.microsoft.com/office/powerpoint/2010/main" val="1024086991"/>
+        <p14:creationId xmlns:p14="http://schemas.microsoft.com/office/powerpoint/2010/main" val="2323097112"/>
       </p:ext>
     </p:extLst>
   </p:cSld>
@@ -582,7 +585,7 @@
     </p:spTree>
     <p:extLst>
       <p:ext uri="{BB962C8B-B14F-4D97-AF65-F5344CB8AC3E}">
-        <p14:creationId xmlns:p14="http://schemas.microsoft.com/office/powerpoint/2010/main" val="1024086991"/>
+        <p14:creationId xmlns:p14="http://schemas.microsoft.com/office/powerpoint/2010/main" val="2025390337"/>
       </p:ext>
     </p:extLst>
   </p:cSld>
@@ -750,7 +753,7 @@
     </p:spTree>
     <p:extLst>
       <p:ext uri="{BB962C8B-B14F-4D97-AF65-F5344CB8AC3E}">
-        <p14:creationId xmlns:p14="http://schemas.microsoft.com/office/powerpoint/2010/main" val="821698108"/>
+        <p14:creationId xmlns:p14="http://schemas.microsoft.com/office/powerpoint/2010/main" val="1024086991"/>
       </p:ext>
     </p:extLst>
   </p:cSld>
@@ -834,7 +837,7 @@
     </p:spTree>
     <p:extLst>
       <p:ext uri="{BB962C8B-B14F-4D97-AF65-F5344CB8AC3E}">
-        <p14:creationId xmlns:p14="http://schemas.microsoft.com/office/powerpoint/2010/main" val="3040905754"/>
+        <p14:creationId xmlns:p14="http://schemas.microsoft.com/office/powerpoint/2010/main" val="1024086991"/>
       </p:ext>
     </p:extLst>
   </p:cSld>
@@ -918,7 +921,7 @@
     </p:spTree>
     <p:extLst>
       <p:ext uri="{BB962C8B-B14F-4D97-AF65-F5344CB8AC3E}">
-        <p14:creationId xmlns:p14="http://schemas.microsoft.com/office/powerpoint/2010/main" val="823137678"/>
+        <p14:creationId xmlns:p14="http://schemas.microsoft.com/office/powerpoint/2010/main" val="1024086991"/>
       </p:ext>
     </p:extLst>
   </p:cSld>
@@ -1002,7 +1005,7 @@
     </p:spTree>
     <p:extLst>
       <p:ext uri="{BB962C8B-B14F-4D97-AF65-F5344CB8AC3E}">
-        <p14:creationId xmlns:p14="http://schemas.microsoft.com/office/powerpoint/2010/main" val="2487145609"/>
+        <p14:creationId xmlns:p14="http://schemas.microsoft.com/office/powerpoint/2010/main" val="821698108"/>
       </p:ext>
     </p:extLst>
   </p:cSld>
@@ -1086,7 +1089,7 @@
     </p:spTree>
     <p:extLst>
       <p:ext uri="{BB962C8B-B14F-4D97-AF65-F5344CB8AC3E}">
-        <p14:creationId xmlns:p14="http://schemas.microsoft.com/office/powerpoint/2010/main" val="3250402497"/>
+        <p14:creationId xmlns:p14="http://schemas.microsoft.com/office/powerpoint/2010/main" val="3040905754"/>
       </p:ext>
     </p:extLst>
   </p:cSld>
@@ -1170,7 +1173,7 @@
     </p:spTree>
     <p:extLst>
       <p:ext uri="{BB962C8B-B14F-4D97-AF65-F5344CB8AC3E}">
-        <p14:creationId xmlns:p14="http://schemas.microsoft.com/office/powerpoint/2010/main" val="1024086991"/>
+        <p14:creationId xmlns:p14="http://schemas.microsoft.com/office/powerpoint/2010/main" val="823137678"/>
       </p:ext>
     </p:extLst>
   </p:cSld>
@@ -1330,6 +1333,258 @@
             <a:fld id="{F7021451-1387-4CA6-816F-3879F97B5CBC}" type="slidenum">
               <a:rPr lang="en-US"/>
               <a:t>20</a:t>
+            </a:fld>
+            <a:endParaRPr lang="en-US" dirty="0"/>
+          </a:p>
+        </p:txBody>
+      </p:sp>
+    </p:spTree>
+    <p:extLst>
+      <p:ext uri="{BB962C8B-B14F-4D97-AF65-F5344CB8AC3E}">
+        <p14:creationId xmlns:p14="http://schemas.microsoft.com/office/powerpoint/2010/main" val="2487145609"/>
+      </p:ext>
+    </p:extLst>
+  </p:cSld>
+  <p:clrMapOvr>
+    <a:masterClrMapping/>
+  </p:clrMapOvr>
+</p:notes>
+</file>
+
+<file path=ppt/notesSlides/notesSlide21.xml><?xml version="1.0" encoding="utf-8"?>
+<p:notes xmlns:a="http://schemas.openxmlformats.org/drawingml/2006/main" xmlns:r="http://schemas.openxmlformats.org/officeDocument/2006/relationships" xmlns:p="http://schemas.openxmlformats.org/presentationml/2006/main">
+  <p:cSld>
+    <p:spTree>
+      <p:nvGrpSpPr>
+        <p:cNvPr id="1" name=""/>
+        <p:cNvGrpSpPr/>
+        <p:nvPr/>
+      </p:nvGrpSpPr>
+      <p:grpSpPr>
+        <a:xfrm>
+          <a:off x="0" y="0"/>
+          <a:ext cx="0" cy="0"/>
+          <a:chOff x="0" y="0"/>
+          <a:chExt cx="0" cy="0"/>
+        </a:xfrm>
+      </p:grpSpPr>
+      <p:sp>
+        <p:nvSpPr>
+          <p:cNvPr id="2" name="Slide Image Placeholder 1"/>
+          <p:cNvSpPr>
+            <a:spLocks noGrp="1" noRot="1" noChangeAspect="1"/>
+          </p:cNvSpPr>
+          <p:nvPr>
+            <p:ph type="sldImg"/>
+          </p:nvPr>
+        </p:nvSpPr>
+        <p:spPr/>
+      </p:sp>
+      <p:sp>
+        <p:nvSpPr>
+          <p:cNvPr id="3" name="Notes Placeholder 2"/>
+          <p:cNvSpPr>
+            <a:spLocks noGrp="1"/>
+          </p:cNvSpPr>
+          <p:nvPr>
+            <p:ph type="body" idx="1"/>
+          </p:nvPr>
+        </p:nvSpPr>
+        <p:spPr/>
+        <p:txBody>
+          <a:bodyPr/>
+          <a:lstStyle/>
+          <a:p>
+            <a:endParaRPr lang="en-US" dirty="0"/>
+          </a:p>
+        </p:txBody>
+      </p:sp>
+      <p:sp>
+        <p:nvSpPr>
+          <p:cNvPr id="4" name="Slide Number Placeholder 3"/>
+          <p:cNvSpPr>
+            <a:spLocks noGrp="1"/>
+          </p:cNvSpPr>
+          <p:nvPr>
+            <p:ph type="sldNum" sz="quarter" idx="10"/>
+          </p:nvPr>
+        </p:nvSpPr>
+        <p:spPr/>
+        <p:txBody>
+          <a:bodyPr/>
+          <a:lstStyle/>
+          <a:p>
+            <a:fld id="{F7021451-1387-4CA6-816F-3879F97B5CBC}" type="slidenum">
+              <a:rPr lang="en-US"/>
+              <a:t>21</a:t>
+            </a:fld>
+            <a:endParaRPr lang="en-US" dirty="0"/>
+          </a:p>
+        </p:txBody>
+      </p:sp>
+    </p:spTree>
+    <p:extLst>
+      <p:ext uri="{BB962C8B-B14F-4D97-AF65-F5344CB8AC3E}">
+        <p14:creationId xmlns:p14="http://schemas.microsoft.com/office/powerpoint/2010/main" val="3250402497"/>
+      </p:ext>
+    </p:extLst>
+  </p:cSld>
+  <p:clrMapOvr>
+    <a:masterClrMapping/>
+  </p:clrMapOvr>
+</p:notes>
+</file>
+
+<file path=ppt/notesSlides/notesSlide22.xml><?xml version="1.0" encoding="utf-8"?>
+<p:notes xmlns:a="http://schemas.openxmlformats.org/drawingml/2006/main" xmlns:r="http://schemas.openxmlformats.org/officeDocument/2006/relationships" xmlns:p="http://schemas.openxmlformats.org/presentationml/2006/main">
+  <p:cSld>
+    <p:spTree>
+      <p:nvGrpSpPr>
+        <p:cNvPr id="1" name=""/>
+        <p:cNvGrpSpPr/>
+        <p:nvPr/>
+      </p:nvGrpSpPr>
+      <p:grpSpPr>
+        <a:xfrm>
+          <a:off x="0" y="0"/>
+          <a:ext cx="0" cy="0"/>
+          <a:chOff x="0" y="0"/>
+          <a:chExt cx="0" cy="0"/>
+        </a:xfrm>
+      </p:grpSpPr>
+      <p:sp>
+        <p:nvSpPr>
+          <p:cNvPr id="2" name="Slide Image Placeholder 1"/>
+          <p:cNvSpPr>
+            <a:spLocks noGrp="1" noRot="1" noChangeAspect="1"/>
+          </p:cNvSpPr>
+          <p:nvPr>
+            <p:ph type="sldImg"/>
+          </p:nvPr>
+        </p:nvSpPr>
+        <p:spPr/>
+      </p:sp>
+      <p:sp>
+        <p:nvSpPr>
+          <p:cNvPr id="3" name="Notes Placeholder 2"/>
+          <p:cNvSpPr>
+            <a:spLocks noGrp="1"/>
+          </p:cNvSpPr>
+          <p:nvPr>
+            <p:ph type="body" idx="1"/>
+          </p:nvPr>
+        </p:nvSpPr>
+        <p:spPr/>
+        <p:txBody>
+          <a:bodyPr/>
+          <a:lstStyle/>
+          <a:p>
+            <a:endParaRPr lang="en-US" dirty="0"/>
+          </a:p>
+        </p:txBody>
+      </p:sp>
+      <p:sp>
+        <p:nvSpPr>
+          <p:cNvPr id="4" name="Slide Number Placeholder 3"/>
+          <p:cNvSpPr>
+            <a:spLocks noGrp="1"/>
+          </p:cNvSpPr>
+          <p:nvPr>
+            <p:ph type="sldNum" sz="quarter" idx="10"/>
+          </p:nvPr>
+        </p:nvSpPr>
+        <p:spPr/>
+        <p:txBody>
+          <a:bodyPr/>
+          <a:lstStyle/>
+          <a:p>
+            <a:fld id="{F7021451-1387-4CA6-816F-3879F97B5CBC}" type="slidenum">
+              <a:rPr lang="en-US"/>
+              <a:t>22</a:t>
+            </a:fld>
+            <a:endParaRPr lang="en-US" dirty="0"/>
+          </a:p>
+        </p:txBody>
+      </p:sp>
+    </p:spTree>
+    <p:extLst>
+      <p:ext uri="{BB962C8B-B14F-4D97-AF65-F5344CB8AC3E}">
+        <p14:creationId xmlns:p14="http://schemas.microsoft.com/office/powerpoint/2010/main" val="1024086991"/>
+      </p:ext>
+    </p:extLst>
+  </p:cSld>
+  <p:clrMapOvr>
+    <a:masterClrMapping/>
+  </p:clrMapOvr>
+</p:notes>
+</file>
+
+<file path=ppt/notesSlides/notesSlide23.xml><?xml version="1.0" encoding="utf-8"?>
+<p:notes xmlns:a="http://schemas.openxmlformats.org/drawingml/2006/main" xmlns:r="http://schemas.openxmlformats.org/officeDocument/2006/relationships" xmlns:p="http://schemas.openxmlformats.org/presentationml/2006/main">
+  <p:cSld>
+    <p:spTree>
+      <p:nvGrpSpPr>
+        <p:cNvPr id="1" name=""/>
+        <p:cNvGrpSpPr/>
+        <p:nvPr/>
+      </p:nvGrpSpPr>
+      <p:grpSpPr>
+        <a:xfrm>
+          <a:off x="0" y="0"/>
+          <a:ext cx="0" cy="0"/>
+          <a:chOff x="0" y="0"/>
+          <a:chExt cx="0" cy="0"/>
+        </a:xfrm>
+      </p:grpSpPr>
+      <p:sp>
+        <p:nvSpPr>
+          <p:cNvPr id="2" name="Slide Image Placeholder 1"/>
+          <p:cNvSpPr>
+            <a:spLocks noGrp="1" noRot="1" noChangeAspect="1"/>
+          </p:cNvSpPr>
+          <p:nvPr>
+            <p:ph type="sldImg"/>
+          </p:nvPr>
+        </p:nvSpPr>
+        <p:spPr/>
+      </p:sp>
+      <p:sp>
+        <p:nvSpPr>
+          <p:cNvPr id="3" name="Notes Placeholder 2"/>
+          <p:cNvSpPr>
+            <a:spLocks noGrp="1"/>
+          </p:cNvSpPr>
+          <p:nvPr>
+            <p:ph type="body" idx="1"/>
+          </p:nvPr>
+        </p:nvSpPr>
+        <p:spPr/>
+        <p:txBody>
+          <a:bodyPr/>
+          <a:lstStyle/>
+          <a:p>
+            <a:endParaRPr lang="en-US" dirty="0"/>
+          </a:p>
+        </p:txBody>
+      </p:sp>
+      <p:sp>
+        <p:nvSpPr>
+          <p:cNvPr id="4" name="Slide Number Placeholder 3"/>
+          <p:cNvSpPr>
+            <a:spLocks noGrp="1"/>
+          </p:cNvSpPr>
+          <p:nvPr>
+            <p:ph type="sldNum" sz="quarter" idx="10"/>
+          </p:nvPr>
+        </p:nvSpPr>
+        <p:spPr/>
+        <p:txBody>
+          <a:bodyPr/>
+          <a:lstStyle/>
+          <a:p>
+            <a:fld id="{F7021451-1387-4CA6-816F-3879F97B5CBC}" type="slidenum">
+              <a:rPr lang="en-US"/>
+              <a:t>23</a:t>
             </a:fld>
             <a:endParaRPr lang="en-US" dirty="0"/>
           </a:p>
@@ -2267,449 +2522,561 @@
       </p:grpSpPr>
       <p:sp>
         <p:nvSpPr>
-          <p:cNvPr id="2" name="Text 0"/>
-          <p:cNvSpPr/>
+          <p:cNvPr id="14" name="Заголовок 1">
+            <a:extLst>
+              <a:ext uri="{FF2B5EF4-FFF2-40B4-BE49-F238E27FC236}">
+                <a16:creationId xmlns:a16="http://schemas.microsoft.com/office/drawing/2014/main" id="{35083CD8-CD74-4299-B170-A251DCE4F748}"/>
+              </a:ext>
+            </a:extLst>
+          </p:cNvPr>
+          <p:cNvSpPr>
+            <a:spLocks noGrp="1"/>
+          </p:cNvSpPr>
           <p:nvPr/>
         </p:nvSpPr>
         <p:spPr>
           <a:xfrm>
-            <a:off x="457200" y="164592"/>
-            <a:ext cx="8229600" cy="640080"/>
+            <a:off x="85725" y="142875"/>
+            <a:ext cx="8886825" cy="3319039"/>
           </a:xfrm>
           <a:prstGeom prst="rect">
             <a:avLst/>
           </a:prstGeom>
-          <a:noFill/>
-          <a:ln/>
         </p:spPr>
         <p:txBody>
-          <a:bodyPr wrap="square" rtlCol="0" anchor="ctr"/>
-          <a:lstStyle/>
-          <a:p>
-            <a:pPr marL="0" indent="0" algn="ctr">
+          <a:bodyPr vert="horz" lIns="91440" tIns="45720" rIns="91440" bIns="45720" rtlCol="0" anchor="b">
+            <a:noAutofit/>
+          </a:bodyPr>
+          <a:lstStyle>
+            <a:lvl1pPr algn="ctr" defTabSz="914400" rtl="0" eaLnBrk="1" latinLnBrk="0" hangingPunct="1">
+              <a:lnSpc>
+                <a:spcPct val="90000"/>
+              </a:lnSpc>
+              <a:spcBef>
+                <a:spcPct val="0"/>
+              </a:spcBef>
               <a:buNone/>
-            </a:pPr>
-            <a:r>
-              <a:rPr lang="en-US" sz="1100" dirty="0">
+              <a:defRPr sz="6000" kern="1200">
                 <a:solidFill>
-                  <a:srgbClr val="000000"/>
+                  <a:schemeClr val="tx1"/>
                 </a:solidFill>
-                <a:ea typeface="Times New Roman" pitchFamily="34" charset="-122"/>
-                <a:cs typeface="Times New Roman" pitchFamily="34" charset="-120"/>
-              </a:rPr>
-              <a:t>МИНИСТЕРСТВО НАУКИ И ВЫСШЕГО ОБРАЗОВАНИЯ РОССИЙСКОЙ ФЕДЕРАЦИИ
-КНИТУ-КАИ · Кафедра прикладной математики и информатики</a:t>
-            </a:r>
-            <a:endParaRPr lang="en-US" sz="1100" dirty="0"/>
+                <a:latin typeface="+mj-lt"/>
+                <a:ea typeface="+mj-ea"/>
+                <a:cs typeface="+mj-cs"/>
+              </a:defRPr>
+            </a:lvl1pPr>
+          </a:lstStyle>
+          <a:p>
+            <a:r>
+              <a:rPr lang="en-US" sz="1800" dirty="0">
+                <a:latin typeface="+mn-lt"/>
+                <a:cs typeface="Times New Roman" panose="02020603050405020304" pitchFamily="18" charset="0"/>
+              </a:rPr>
+              <a:t>К</a:t>
+            </a:r>
+            <a:r>
+              <a:rPr lang="ru-RU" sz="1800" dirty="0" err="1">
+                <a:latin typeface="+mn-lt"/>
+                <a:cs typeface="Times New Roman" panose="02020603050405020304" pitchFamily="18" charset="0"/>
+              </a:rPr>
+              <a:t>азанский</a:t>
+            </a:r>
+            <a:r>
+              <a:rPr lang="en-US" sz="1800" dirty="0">
+                <a:latin typeface="+mn-lt"/>
+                <a:cs typeface="Times New Roman" panose="02020603050405020304" pitchFamily="18" charset="0"/>
+              </a:rPr>
+              <a:t> </a:t>
+            </a:r>
+            <a:r>
+              <a:rPr lang="ru-RU" sz="1800" dirty="0">
+                <a:latin typeface="+mn-lt"/>
+                <a:cs typeface="Times New Roman" panose="02020603050405020304" pitchFamily="18" charset="0"/>
+              </a:rPr>
+              <a:t>н</a:t>
+            </a:r>
+            <a:r>
+              <a:rPr lang="en-US" sz="1800" dirty="0" err="1">
+                <a:latin typeface="+mn-lt"/>
+                <a:cs typeface="Times New Roman" panose="02020603050405020304" pitchFamily="18" charset="0"/>
+              </a:rPr>
+              <a:t>ациональный</a:t>
+            </a:r>
+            <a:r>
+              <a:rPr lang="en-US" sz="1800" dirty="0">
+                <a:latin typeface="+mn-lt"/>
+                <a:cs typeface="Times New Roman" panose="02020603050405020304" pitchFamily="18" charset="0"/>
+              </a:rPr>
+              <a:t> </a:t>
+            </a:r>
+            <a:r>
+              <a:rPr lang="ru-RU" sz="1800" dirty="0">
+                <a:latin typeface="+mn-lt"/>
+                <a:cs typeface="Times New Roman" panose="02020603050405020304" pitchFamily="18" charset="0"/>
+              </a:rPr>
+              <a:t>и</a:t>
+            </a:r>
+            <a:r>
+              <a:rPr lang="en-US" sz="1800" dirty="0" err="1">
+                <a:latin typeface="+mn-lt"/>
+                <a:cs typeface="Times New Roman" panose="02020603050405020304" pitchFamily="18" charset="0"/>
+              </a:rPr>
+              <a:t>сследовательский</a:t>
+            </a:r>
+            <a:r>
+              <a:rPr lang="en-US" sz="1800" dirty="0">
+                <a:latin typeface="+mn-lt"/>
+                <a:cs typeface="Times New Roman" panose="02020603050405020304" pitchFamily="18" charset="0"/>
+              </a:rPr>
+              <a:t> </a:t>
+            </a:r>
+            <a:r>
+              <a:rPr lang="ru-RU" sz="1800" dirty="0">
+                <a:latin typeface="+mn-lt"/>
+                <a:cs typeface="Times New Roman" panose="02020603050405020304" pitchFamily="18" charset="0"/>
+              </a:rPr>
+              <a:t>т</a:t>
+            </a:r>
+            <a:r>
+              <a:rPr lang="en-US" sz="1800" dirty="0" err="1">
+                <a:latin typeface="+mn-lt"/>
+                <a:cs typeface="Times New Roman" panose="02020603050405020304" pitchFamily="18" charset="0"/>
+              </a:rPr>
+              <a:t>ехнический</a:t>
+            </a:r>
+            <a:r>
+              <a:rPr lang="en-US" sz="1800" dirty="0">
+                <a:latin typeface="+mn-lt"/>
+                <a:cs typeface="Times New Roman" panose="02020603050405020304" pitchFamily="18" charset="0"/>
+              </a:rPr>
+              <a:t> </a:t>
+            </a:r>
+            <a:r>
+              <a:rPr lang="ru-RU" sz="1800" dirty="0">
+                <a:latin typeface="+mn-lt"/>
+                <a:cs typeface="Times New Roman" panose="02020603050405020304" pitchFamily="18" charset="0"/>
+              </a:rPr>
+              <a:t>у</a:t>
+            </a:r>
+            <a:r>
+              <a:rPr lang="en-US" sz="1800" dirty="0" err="1">
+                <a:latin typeface="+mn-lt"/>
+                <a:cs typeface="Times New Roman" panose="02020603050405020304" pitchFamily="18" charset="0"/>
+              </a:rPr>
+              <a:t>ниверситет</a:t>
+            </a:r>
+            <a:br>
+              <a:rPr lang="en-US" sz="1800" dirty="0">
+                <a:latin typeface="+mn-lt"/>
+                <a:cs typeface="Times New Roman" panose="02020603050405020304" pitchFamily="18" charset="0"/>
+              </a:rPr>
+            </a:br>
+            <a:r>
+              <a:rPr lang="en-US" sz="1800" dirty="0" err="1">
+                <a:latin typeface="+mn-lt"/>
+                <a:cs typeface="Times New Roman" panose="02020603050405020304" pitchFamily="18" charset="0"/>
+              </a:rPr>
+              <a:t>им</a:t>
+            </a:r>
+            <a:r>
+              <a:rPr lang="en-US" sz="1800" dirty="0">
+                <a:latin typeface="+mn-lt"/>
+                <a:cs typeface="Times New Roman" panose="02020603050405020304" pitchFamily="18" charset="0"/>
+              </a:rPr>
+              <a:t>. А. Н. </a:t>
+            </a:r>
+            <a:r>
+              <a:rPr lang="en-US" sz="1800" dirty="0" err="1">
+                <a:latin typeface="+mn-lt"/>
+                <a:cs typeface="Times New Roman" panose="02020603050405020304" pitchFamily="18" charset="0"/>
+              </a:rPr>
+              <a:t>Туполева</a:t>
+            </a:r>
+            <a:br>
+              <a:rPr lang="en-US" sz="1800" dirty="0">
+                <a:latin typeface="+mn-lt"/>
+                <a:cs typeface="Times New Roman" panose="02020603050405020304" pitchFamily="18" charset="0"/>
+              </a:rPr>
+            </a:br>
+            <a:r>
+              <a:rPr lang="en-US" sz="1800" dirty="0">
+                <a:latin typeface="+mn-lt"/>
+                <a:cs typeface="Times New Roman" panose="02020603050405020304" pitchFamily="18" charset="0"/>
+              </a:rPr>
+              <a:t>(КНИТУ - КАИ)</a:t>
+            </a:r>
+            <a:br>
+              <a:rPr lang="ru-RU" sz="1800" dirty="0">
+                <a:latin typeface="+mn-lt"/>
+                <a:cs typeface="Times New Roman" panose="02020603050405020304" pitchFamily="18" charset="0"/>
+              </a:rPr>
+            </a:br>
+            <a:br>
+              <a:rPr lang="en-US" sz="1800" dirty="0">
+                <a:latin typeface="+mn-lt"/>
+                <a:cs typeface="Times New Roman" panose="02020603050405020304" pitchFamily="18" charset="0"/>
+              </a:rPr>
+            </a:br>
+            <a:r>
+              <a:rPr lang="en-US" sz="1800" dirty="0">
+                <a:latin typeface="+mn-lt"/>
+                <a:cs typeface="Times New Roman" panose="02020603050405020304" pitchFamily="18" charset="0"/>
+              </a:rPr>
+              <a:t>КАФЕДРА ПРИКЛАДНОЙ МАТЕМАТИКИ И ИНФОРМАТИКИ</a:t>
+            </a:r>
+            <a:br>
+              <a:rPr lang="ru-RU" sz="1800" dirty="0">
+                <a:latin typeface="+mn-lt"/>
+                <a:cs typeface="Times New Roman" panose="02020603050405020304" pitchFamily="18" charset="0"/>
+              </a:rPr>
+            </a:br>
+            <a:br>
+              <a:rPr lang="en-US" sz="1800" dirty="0">
+                <a:latin typeface="+mn-lt"/>
+                <a:cs typeface="Times New Roman" panose="02020603050405020304" pitchFamily="18" charset="0"/>
+              </a:rPr>
+            </a:br>
+            <a:r>
+              <a:rPr lang="ru-RU" sz="1800" dirty="0">
+                <a:latin typeface="+mn-lt"/>
+                <a:cs typeface="Times New Roman" panose="02020603050405020304" pitchFamily="18" charset="0"/>
+              </a:rPr>
+              <a:t>Направление подготовки: 09.03.04 Программная инженерия</a:t>
+            </a:r>
+            <a:br>
+              <a:rPr lang="en-US" sz="1800" dirty="0">
+                <a:latin typeface="+mn-lt"/>
+                <a:cs typeface="Times New Roman" panose="02020603050405020304" pitchFamily="18" charset="0"/>
+              </a:rPr>
+            </a:br>
+            <a:br>
+              <a:rPr lang="ru-RU" sz="1800" dirty="0">
+                <a:latin typeface="+mn-lt"/>
+                <a:cs typeface="Times New Roman" panose="02020603050405020304" pitchFamily="18" charset="0"/>
+              </a:rPr>
+            </a:br>
+            <a:r>
+              <a:rPr lang="ru-RU" sz="1800" dirty="0">
+                <a:latin typeface="+mn-lt"/>
+                <a:cs typeface="Times New Roman" panose="02020603050405020304" pitchFamily="18" charset="0"/>
+              </a:rPr>
+              <a:t>Презентация выпускной квалификационной работы </a:t>
+            </a:r>
+            <a:r>
+              <a:rPr lang="en-US" sz="1800" dirty="0" err="1">
+                <a:latin typeface="+mn-lt"/>
+                <a:cs typeface="Times New Roman" panose="02020603050405020304" pitchFamily="18" charset="0"/>
+              </a:rPr>
+              <a:t>на</a:t>
+            </a:r>
+            <a:r>
+              <a:rPr lang="en-US" sz="1800" dirty="0">
+                <a:latin typeface="+mn-lt"/>
+                <a:cs typeface="Times New Roman" panose="02020603050405020304" pitchFamily="18" charset="0"/>
+              </a:rPr>
+              <a:t> </a:t>
+            </a:r>
+            <a:r>
+              <a:rPr lang="en-US" sz="1800" dirty="0" err="1">
+                <a:latin typeface="+mn-lt"/>
+                <a:cs typeface="Times New Roman" panose="02020603050405020304" pitchFamily="18" charset="0"/>
+              </a:rPr>
+              <a:t>тему</a:t>
+            </a:r>
+            <a:r>
+              <a:rPr lang="en-US" sz="1800" dirty="0">
+                <a:latin typeface="+mn-lt"/>
+                <a:cs typeface="Times New Roman" panose="02020603050405020304" pitchFamily="18" charset="0"/>
+              </a:rPr>
+              <a:t>:</a:t>
+            </a:r>
+            <a:br>
+              <a:rPr lang="ru-RU" sz="1800" dirty="0">
+                <a:latin typeface="+mn-lt"/>
+                <a:cs typeface="Times New Roman" panose="02020603050405020304" pitchFamily="18" charset="0"/>
+              </a:rPr>
+            </a:br>
+            <a:br>
+              <a:rPr lang="en-US" sz="1800" dirty="0">
+                <a:latin typeface="+mn-lt"/>
+                <a:cs typeface="Times New Roman" panose="02020603050405020304" pitchFamily="18" charset="0"/>
+              </a:rPr>
+            </a:br>
+            <a:r>
+              <a:rPr lang="ru-RU" sz="2100" b="1" kern="0" dirty="0">
+                <a:effectLst/>
+                <a:latin typeface="+mn-lt"/>
+                <a:ea typeface="Times New Roman" panose="02020603050405020304" pitchFamily="18" charset="0"/>
+              </a:rPr>
+              <a:t>«Разработка прототипа сервиса по выбору научного руководителя для выпускной квалификационной работы в высшем учебном заведении»</a:t>
+            </a:r>
+            <a:endParaRPr lang="ru-RU" sz="2100" b="1" dirty="0">
+              <a:latin typeface="+mn-lt"/>
+            </a:endParaRPr>
           </a:p>
         </p:txBody>
       </p:sp>
       <p:sp>
         <p:nvSpPr>
-          <p:cNvPr id="3" name="Shape 1"/>
-          <p:cNvSpPr/>
+          <p:cNvPr id="15" name="Подзаголовок 2">
+            <a:extLst>
+              <a:ext uri="{FF2B5EF4-FFF2-40B4-BE49-F238E27FC236}">
+                <a16:creationId xmlns:a16="http://schemas.microsoft.com/office/drawing/2014/main" id="{A5632F01-C984-4864-B079-918D8E76062B}"/>
+              </a:ext>
+            </a:extLst>
+          </p:cNvPr>
+          <p:cNvSpPr>
+            <a:spLocks noGrp="1"/>
+          </p:cNvSpPr>
           <p:nvPr/>
         </p:nvSpPr>
         <p:spPr>
           <a:xfrm>
-            <a:off x="365760" y="868680"/>
-            <a:ext cx="8412480" cy="27432"/>
+            <a:off x="5614415" y="3461914"/>
+            <a:ext cx="3358135" cy="1538711"/>
           </a:xfrm>
           <a:prstGeom prst="rect">
             <a:avLst/>
           </a:prstGeom>
-          <a:solidFill>
-            <a:srgbClr val="000000"/>
-          </a:solidFill>
-          <a:ln w="12700">
-            <a:solidFill>
-              <a:srgbClr val="000000"/>
-            </a:solidFill>
-            <a:prstDash val="solid"/>
-          </a:ln>
-        </p:spPr>
-      </p:sp>
-      <p:sp>
-        <p:nvSpPr>
-          <p:cNvPr id="4" name="Shape 2"/>
-          <p:cNvSpPr/>
-          <p:nvPr/>
-        </p:nvSpPr>
-        <p:spPr>
-          <a:xfrm>
-            <a:off x="365760" y="896112"/>
-            <a:ext cx="8412480" cy="27432"/>
-          </a:xfrm>
-          <a:prstGeom prst="rect">
-            <a:avLst/>
-          </a:prstGeom>
-          <a:solidFill>
-            <a:srgbClr val="000000"/>
-          </a:solidFill>
-          <a:ln w="12700">
-            <a:solidFill>
-              <a:srgbClr val="000000"/>
-            </a:solidFill>
-            <a:prstDash val="solid"/>
-          </a:ln>
-        </p:spPr>
-      </p:sp>
-      <p:sp>
-        <p:nvSpPr>
-          <p:cNvPr id="5" name="Text 3"/>
-          <p:cNvSpPr/>
-          <p:nvPr/>
-        </p:nvSpPr>
-        <p:spPr>
-          <a:xfrm>
-            <a:off x="457200" y="1005840"/>
-            <a:ext cx="8229600" cy="411480"/>
-          </a:xfrm>
-          <a:prstGeom prst="rect">
-            <a:avLst/>
-          </a:prstGeom>
-          <a:noFill/>
-          <a:ln/>
         </p:spPr>
         <p:txBody>
-          <a:bodyPr wrap="square" rtlCol="0" anchor="ctr"/>
-          <a:lstStyle/>
-          <a:p>
-            <a:pPr marL="0" indent="0" algn="ctr">
+          <a:bodyPr vert="horz" lIns="91440" tIns="45720" rIns="91440" bIns="45720" rtlCol="0">
+            <a:noAutofit/>
+          </a:bodyPr>
+          <a:lstStyle>
+            <a:lvl1pPr marL="0" indent="0" algn="ctr" defTabSz="914400" rtl="0" eaLnBrk="1" latinLnBrk="0" hangingPunct="1">
+              <a:lnSpc>
+                <a:spcPct val="90000"/>
+              </a:lnSpc>
+              <a:spcBef>
+                <a:spcPts val="1000"/>
+              </a:spcBef>
+              <a:buFont typeface="Arial" panose="020B0604020202020204" pitchFamily="34" charset="0"/>
               <a:buNone/>
+              <a:defRPr sz="2400" kern="1200">
+                <a:solidFill>
+                  <a:schemeClr val="tx1"/>
+                </a:solidFill>
+                <a:latin typeface="+mn-lt"/>
+                <a:ea typeface="+mn-ea"/>
+                <a:cs typeface="+mn-cs"/>
+              </a:defRPr>
+            </a:lvl1pPr>
+            <a:lvl2pPr marL="457200" indent="0" algn="ctr" defTabSz="914400" rtl="0" eaLnBrk="1" latinLnBrk="0" hangingPunct="1">
+              <a:lnSpc>
+                <a:spcPct val="90000"/>
+              </a:lnSpc>
+              <a:spcBef>
+                <a:spcPts val="500"/>
+              </a:spcBef>
+              <a:buFont typeface="Arial" panose="020B0604020202020204" pitchFamily="34" charset="0"/>
+              <a:buNone/>
+              <a:defRPr sz="2000" kern="1200">
+                <a:solidFill>
+                  <a:schemeClr val="tx1"/>
+                </a:solidFill>
+                <a:latin typeface="+mn-lt"/>
+                <a:ea typeface="+mn-ea"/>
+                <a:cs typeface="+mn-cs"/>
+              </a:defRPr>
+            </a:lvl2pPr>
+            <a:lvl3pPr marL="914400" indent="0" algn="ctr" defTabSz="914400" rtl="0" eaLnBrk="1" latinLnBrk="0" hangingPunct="1">
+              <a:lnSpc>
+                <a:spcPct val="90000"/>
+              </a:lnSpc>
+              <a:spcBef>
+                <a:spcPts val="500"/>
+              </a:spcBef>
+              <a:buFont typeface="Arial" panose="020B0604020202020204" pitchFamily="34" charset="0"/>
+              <a:buNone/>
+              <a:defRPr sz="1800" kern="1200">
+                <a:solidFill>
+                  <a:schemeClr val="tx1"/>
+                </a:solidFill>
+                <a:latin typeface="+mn-lt"/>
+                <a:ea typeface="+mn-ea"/>
+                <a:cs typeface="+mn-cs"/>
+              </a:defRPr>
+            </a:lvl3pPr>
+            <a:lvl4pPr marL="1371600" indent="0" algn="ctr" defTabSz="914400" rtl="0" eaLnBrk="1" latinLnBrk="0" hangingPunct="1">
+              <a:lnSpc>
+                <a:spcPct val="90000"/>
+              </a:lnSpc>
+              <a:spcBef>
+                <a:spcPts val="500"/>
+              </a:spcBef>
+              <a:buFont typeface="Arial" panose="020B0604020202020204" pitchFamily="34" charset="0"/>
+              <a:buNone/>
+              <a:defRPr sz="1600" kern="1200">
+                <a:solidFill>
+                  <a:schemeClr val="tx1"/>
+                </a:solidFill>
+                <a:latin typeface="+mn-lt"/>
+                <a:ea typeface="+mn-ea"/>
+                <a:cs typeface="+mn-cs"/>
+              </a:defRPr>
+            </a:lvl4pPr>
+            <a:lvl5pPr marL="1828800" indent="0" algn="ctr" defTabSz="914400" rtl="0" eaLnBrk="1" latinLnBrk="0" hangingPunct="1">
+              <a:lnSpc>
+                <a:spcPct val="90000"/>
+              </a:lnSpc>
+              <a:spcBef>
+                <a:spcPts val="500"/>
+              </a:spcBef>
+              <a:buFont typeface="Arial" panose="020B0604020202020204" pitchFamily="34" charset="0"/>
+              <a:buNone/>
+              <a:defRPr sz="1600" kern="1200">
+                <a:solidFill>
+                  <a:schemeClr val="tx1"/>
+                </a:solidFill>
+                <a:latin typeface="+mn-lt"/>
+                <a:ea typeface="+mn-ea"/>
+                <a:cs typeface="+mn-cs"/>
+              </a:defRPr>
+            </a:lvl5pPr>
+            <a:lvl6pPr marL="2286000" indent="0" algn="ctr" defTabSz="914400" rtl="0" eaLnBrk="1" latinLnBrk="0" hangingPunct="1">
+              <a:lnSpc>
+                <a:spcPct val="90000"/>
+              </a:lnSpc>
+              <a:spcBef>
+                <a:spcPts val="500"/>
+              </a:spcBef>
+              <a:buFont typeface="Arial" panose="020B0604020202020204" pitchFamily="34" charset="0"/>
+              <a:buNone/>
+              <a:defRPr sz="1600" kern="1200">
+                <a:solidFill>
+                  <a:schemeClr val="tx1"/>
+                </a:solidFill>
+                <a:latin typeface="+mn-lt"/>
+                <a:ea typeface="+mn-ea"/>
+                <a:cs typeface="+mn-cs"/>
+              </a:defRPr>
+            </a:lvl6pPr>
+            <a:lvl7pPr marL="2743200" indent="0" algn="ctr" defTabSz="914400" rtl="0" eaLnBrk="1" latinLnBrk="0" hangingPunct="1">
+              <a:lnSpc>
+                <a:spcPct val="90000"/>
+              </a:lnSpc>
+              <a:spcBef>
+                <a:spcPts val="500"/>
+              </a:spcBef>
+              <a:buFont typeface="Arial" panose="020B0604020202020204" pitchFamily="34" charset="0"/>
+              <a:buNone/>
+              <a:defRPr sz="1600" kern="1200">
+                <a:solidFill>
+                  <a:schemeClr val="tx1"/>
+                </a:solidFill>
+                <a:latin typeface="+mn-lt"/>
+                <a:ea typeface="+mn-ea"/>
+                <a:cs typeface="+mn-cs"/>
+              </a:defRPr>
+            </a:lvl7pPr>
+            <a:lvl8pPr marL="3200400" indent="0" algn="ctr" defTabSz="914400" rtl="0" eaLnBrk="1" latinLnBrk="0" hangingPunct="1">
+              <a:lnSpc>
+                <a:spcPct val="90000"/>
+              </a:lnSpc>
+              <a:spcBef>
+                <a:spcPts val="500"/>
+              </a:spcBef>
+              <a:buFont typeface="Arial" panose="020B0604020202020204" pitchFamily="34" charset="0"/>
+              <a:buNone/>
+              <a:defRPr sz="1600" kern="1200">
+                <a:solidFill>
+                  <a:schemeClr val="tx1"/>
+                </a:solidFill>
+                <a:latin typeface="+mn-lt"/>
+                <a:ea typeface="+mn-ea"/>
+                <a:cs typeface="+mn-cs"/>
+              </a:defRPr>
+            </a:lvl8pPr>
+            <a:lvl9pPr marL="3657600" indent="0" algn="ctr" defTabSz="914400" rtl="0" eaLnBrk="1" latinLnBrk="0" hangingPunct="1">
+              <a:lnSpc>
+                <a:spcPct val="90000"/>
+              </a:lnSpc>
+              <a:spcBef>
+                <a:spcPts val="500"/>
+              </a:spcBef>
+              <a:buFont typeface="Arial" panose="020B0604020202020204" pitchFamily="34" charset="0"/>
+              <a:buNone/>
+              <a:defRPr sz="1600" kern="1200">
+                <a:solidFill>
+                  <a:schemeClr val="tx1"/>
+                </a:solidFill>
+                <a:latin typeface="+mn-lt"/>
+                <a:ea typeface="+mn-ea"/>
+                <a:cs typeface="+mn-cs"/>
+              </a:defRPr>
+            </a:lvl9pPr>
+          </a:lstStyle>
+          <a:p>
+            <a:pPr algn="r" fontAlgn="auto">
+              <a:spcAft>
+                <a:spcPts val="0"/>
+              </a:spcAft>
+              <a:defRPr/>
             </a:pPr>
             <a:r>
-              <a:rPr lang="en-US" sz="1600" b="1" dirty="0">
-                <a:solidFill>
-                  <a:srgbClr val="000000"/>
-                </a:solidFill>
-                <a:ea typeface="Times New Roman" pitchFamily="34" charset="-122"/>
-                <a:cs typeface="Times New Roman" pitchFamily="34" charset="-120"/>
-              </a:rPr>
-              <a:t>ВЫПУСКНАЯ КВАЛИФИКАЦИОННАЯ РАБОТ</a:t>
-            </a:r>
-            <a:endParaRPr lang="en-US" sz="1600" dirty="0"/>
-          </a:p>
-        </p:txBody>
-      </p:sp>
-      <p:sp>
-        <p:nvSpPr>
-          <p:cNvPr id="6" name="Text 4"/>
-          <p:cNvSpPr/>
-          <p:nvPr/>
-        </p:nvSpPr>
-        <p:spPr>
-          <a:xfrm>
-            <a:off x="640080" y="1508760"/>
-            <a:ext cx="7863840" cy="1005840"/>
-          </a:xfrm>
-          <a:prstGeom prst="rect">
-            <a:avLst/>
-          </a:prstGeom>
-          <a:noFill/>
-          <a:ln/>
-        </p:spPr>
-        <p:txBody>
-          <a:bodyPr wrap="square" rtlCol="0" anchor="ctr"/>
-          <a:lstStyle/>
-          <a:p>
-            <a:pPr marL="0" indent="0" algn="ctr">
-              <a:buNone/>
+              <a:rPr lang="ru-RU" sz="1600" dirty="0">
+                <a:cs typeface="Calibri"/>
+              </a:rPr>
+              <a:t>Выполнил: студент гр. 4411</a:t>
+            </a:r>
+          </a:p>
+          <a:p>
+            <a:pPr algn="r" fontAlgn="auto">
+              <a:spcAft>
+                <a:spcPts val="0"/>
+              </a:spcAft>
+              <a:defRPr/>
             </a:pPr>
             <a:r>
-              <a:rPr lang="en-US" sz="2000" b="1" dirty="0">
-                <a:solidFill>
-                  <a:srgbClr val="000000"/>
-                </a:solidFill>
-                <a:ea typeface="Times New Roman" pitchFamily="34" charset="-122"/>
-                <a:cs typeface="Times New Roman" pitchFamily="34" charset="-120"/>
-              </a:rPr>
-              <a:t>«Разработка прототипа сервиса по выбору научного руководителя</a:t>
-            </a:r>
-            <a:endParaRPr lang="en-US" sz="2000" dirty="0"/>
-          </a:p>
-          <a:p>
-            <a:pPr marL="0" indent="0" algn="ctr">
-              <a:buNone/>
+              <a:rPr lang="ru-RU" sz="1600" dirty="0">
+                <a:cs typeface="Calibri"/>
+              </a:rPr>
+              <a:t>Ильин А.А.</a:t>
+            </a:r>
+          </a:p>
+          <a:p>
+            <a:pPr algn="r" fontAlgn="auto">
+              <a:spcAft>
+                <a:spcPts val="0"/>
+              </a:spcAft>
+              <a:defRPr/>
             </a:pPr>
             <a:r>
-              <a:rPr lang="en-US" sz="2000" b="1" dirty="0">
-                <a:solidFill>
-                  <a:srgbClr val="000000"/>
-                </a:solidFill>
-                <a:ea typeface="Times New Roman" pitchFamily="34" charset="-122"/>
-                <a:cs typeface="Times New Roman" pitchFamily="34" charset="-120"/>
-              </a:rPr>
-              <a:t>для выпускных квалификационных работ в высшем учебном заведении»</a:t>
-            </a:r>
-            <a:endParaRPr lang="en-US" sz="2000" dirty="0"/>
-          </a:p>
-        </p:txBody>
-      </p:sp>
-      <p:sp>
-        <p:nvSpPr>
-          <p:cNvPr id="7" name="Shape 5"/>
-          <p:cNvSpPr/>
-          <p:nvPr/>
-        </p:nvSpPr>
-        <p:spPr>
-          <a:xfrm>
-            <a:off x="365760" y="2606040"/>
-            <a:ext cx="8412480" cy="27432"/>
-          </a:xfrm>
-          <a:prstGeom prst="rect">
-            <a:avLst/>
-          </a:prstGeom>
-          <a:solidFill>
-            <a:srgbClr val="000000"/>
-          </a:solidFill>
-          <a:ln w="12700">
-            <a:solidFill>
-              <a:srgbClr val="000000"/>
-            </a:solidFill>
-            <a:prstDash val="solid"/>
-          </a:ln>
-        </p:spPr>
-      </p:sp>
-      <p:sp>
-        <p:nvSpPr>
-          <p:cNvPr id="8" name="Text 6"/>
-          <p:cNvSpPr/>
-          <p:nvPr/>
-        </p:nvSpPr>
-        <p:spPr>
-          <a:xfrm>
-            <a:off x="457200" y="2743200"/>
-            <a:ext cx="8229600" cy="320040"/>
-          </a:xfrm>
-          <a:prstGeom prst="rect">
-            <a:avLst/>
-          </a:prstGeom>
-          <a:noFill/>
-          <a:ln/>
-        </p:spPr>
-        <p:txBody>
-          <a:bodyPr wrap="square" rtlCol="0" anchor="ctr"/>
-          <a:lstStyle/>
-          <a:p>
-            <a:pPr marL="0" indent="0" algn="ctr">
-              <a:buNone/>
+              <a:rPr lang="ru-RU" sz="1600" dirty="0">
+                <a:cs typeface="Calibri"/>
+              </a:rPr>
+              <a:t>Руководитель: </a:t>
+            </a:r>
+            <a:r>
+              <a:rPr lang="ru-RU" sz="1600" dirty="0" err="1">
+                <a:cs typeface="Calibri"/>
+              </a:rPr>
+              <a:t>канд.техн.наук</a:t>
+            </a:r>
+            <a:r>
+              <a:rPr lang="ru-RU" sz="1600" dirty="0">
+                <a:cs typeface="Calibri"/>
+              </a:rPr>
+              <a:t>, доцент каф. ПМИ</a:t>
+            </a:r>
+          </a:p>
+          <a:p>
+            <a:pPr algn="r" fontAlgn="auto">
+              <a:spcAft>
+                <a:spcPts val="0"/>
+              </a:spcAft>
+              <a:defRPr/>
             </a:pPr>
             <a:r>
-              <a:rPr lang="en-US" sz="1500" dirty="0">
-                <a:solidFill>
-                  <a:srgbClr val="000000"/>
-                </a:solidFill>
-                <a:ea typeface="Times New Roman" pitchFamily="34" charset="-122"/>
-                <a:cs typeface="Times New Roman" pitchFamily="34" charset="-120"/>
-              </a:rPr>
-              <a:t>Обучающийся группы 4411:  </a:t>
-            </a:r>
-            <a:r>
-              <a:rPr lang="en-US" sz="1500" b="1" dirty="0">
-                <a:solidFill>
-                  <a:srgbClr val="000000"/>
-                </a:solidFill>
-                <a:ea typeface="Times New Roman" pitchFamily="34" charset="-122"/>
-                <a:cs typeface="Times New Roman" pitchFamily="34" charset="-120"/>
-              </a:rPr>
-              <a:t>Ильин Айдар Альбертович</a:t>
-            </a:r>
-            <a:endParaRPr lang="en-US" sz="1500" dirty="0"/>
-          </a:p>
-        </p:txBody>
-      </p:sp>
-      <p:sp>
-        <p:nvSpPr>
-          <p:cNvPr id="9" name="Text 7"/>
-          <p:cNvSpPr/>
-          <p:nvPr/>
-        </p:nvSpPr>
-        <p:spPr>
-          <a:xfrm>
-            <a:off x="457200" y="3108960"/>
-            <a:ext cx="8229600" cy="320040"/>
-          </a:xfrm>
-          <a:prstGeom prst="rect">
-            <a:avLst/>
-          </a:prstGeom>
-          <a:noFill/>
-          <a:ln/>
-        </p:spPr>
-        <p:txBody>
-          <a:bodyPr wrap="square" rtlCol="0" anchor="ctr"/>
-          <a:lstStyle/>
-          <a:p>
-            <a:pPr marL="0" indent="0" algn="ctr">
-              <a:buNone/>
-            </a:pPr>
-            <a:r>
-              <a:rPr lang="ru-RU" sz="1500" dirty="0">
-                <a:solidFill>
-                  <a:srgbClr val="000000"/>
-                </a:solidFill>
-                <a:ea typeface="Times New Roman" pitchFamily="34" charset="-122"/>
-                <a:cs typeface="Times New Roman" pitchFamily="34" charset="-120"/>
-              </a:rPr>
-              <a:t>Р</a:t>
-            </a:r>
-            <a:r>
-              <a:rPr lang="en-US" sz="1500" dirty="0">
-                <a:solidFill>
-                  <a:srgbClr val="000000"/>
-                </a:solidFill>
-                <a:ea typeface="Times New Roman" pitchFamily="34" charset="-122"/>
-                <a:cs typeface="Times New Roman" pitchFamily="34" charset="-120"/>
-              </a:rPr>
-              <a:t>уководитель:  </a:t>
-            </a:r>
-            <a:r>
-              <a:rPr lang="ru-RU" sz="1500" dirty="0">
-                <a:solidFill>
-                  <a:srgbClr val="000000"/>
-                </a:solidFill>
-                <a:ea typeface="Times New Roman" pitchFamily="34" charset="-122"/>
-                <a:cs typeface="Times New Roman" pitchFamily="34" charset="-120"/>
-              </a:rPr>
-              <a:t>доцент кафедры ПМИ </a:t>
-            </a:r>
-            <a:r>
-              <a:rPr lang="ru-RU" sz="1500" b="1" dirty="0">
-                <a:solidFill>
-                  <a:srgbClr val="000000"/>
-                </a:solidFill>
-                <a:ea typeface="Times New Roman" pitchFamily="34" charset="-122"/>
-                <a:cs typeface="Times New Roman" pitchFamily="34" charset="-120"/>
-              </a:rPr>
-              <a:t>Валитова Н.Л.</a:t>
-            </a:r>
-            <a:endParaRPr lang="en-US" sz="1500" dirty="0"/>
-          </a:p>
-        </p:txBody>
-      </p:sp>
-      <p:sp>
-        <p:nvSpPr>
-          <p:cNvPr id="10" name="Text 8"/>
-          <p:cNvSpPr/>
-          <p:nvPr/>
-        </p:nvSpPr>
-        <p:spPr>
-          <a:xfrm>
-            <a:off x="457200" y="3520440"/>
-            <a:ext cx="8229600" cy="292608"/>
-          </a:xfrm>
-          <a:prstGeom prst="rect">
-            <a:avLst/>
-          </a:prstGeom>
-          <a:noFill/>
-          <a:ln/>
-        </p:spPr>
-        <p:txBody>
-          <a:bodyPr wrap="square" rtlCol="0" anchor="ctr"/>
-          <a:lstStyle/>
-          <a:p>
-            <a:pPr marL="0" indent="0" algn="ctr">
-              <a:buNone/>
-            </a:pPr>
-            <a:r>
-              <a:rPr lang="en-US" sz="1200" dirty="0">
-                <a:solidFill>
-                  <a:srgbClr val="808080"/>
-                </a:solidFill>
-                <a:ea typeface="Times New Roman" pitchFamily="34" charset="-122"/>
-                <a:cs typeface="Times New Roman" pitchFamily="34" charset="-120"/>
-              </a:rPr>
-              <a:t>Направление: 09.03.04 Программная инженерия</a:t>
-            </a:r>
-            <a:endParaRPr lang="en-US" sz="1200" dirty="0"/>
-          </a:p>
-        </p:txBody>
-      </p:sp>
-      <p:sp>
-        <p:nvSpPr>
-          <p:cNvPr id="11" name="Shape 9"/>
-          <p:cNvSpPr/>
-          <p:nvPr/>
-        </p:nvSpPr>
-        <p:spPr>
-          <a:xfrm>
-            <a:off x="365760" y="3886200"/>
-            <a:ext cx="8412480" cy="27432"/>
-          </a:xfrm>
-          <a:prstGeom prst="rect">
-            <a:avLst/>
-          </a:prstGeom>
-          <a:solidFill>
-            <a:srgbClr val="000000"/>
-          </a:solidFill>
-          <a:ln w="12700">
-            <a:solidFill>
-              <a:srgbClr val="000000"/>
-            </a:solidFill>
-            <a:prstDash val="solid"/>
-          </a:ln>
-        </p:spPr>
-      </p:sp>
-      <p:sp>
-        <p:nvSpPr>
-          <p:cNvPr id="12" name="Shape 10"/>
-          <p:cNvSpPr/>
-          <p:nvPr/>
-        </p:nvSpPr>
-        <p:spPr>
-          <a:xfrm>
-            <a:off x="365760" y="3913632"/>
-            <a:ext cx="8412480" cy="27432"/>
-          </a:xfrm>
-          <a:prstGeom prst="rect">
-            <a:avLst/>
-          </a:prstGeom>
-          <a:solidFill>
-            <a:srgbClr val="000000"/>
-          </a:solidFill>
-          <a:ln w="12700">
-            <a:solidFill>
-              <a:srgbClr val="000000"/>
-            </a:solidFill>
-            <a:prstDash val="solid"/>
-          </a:ln>
-        </p:spPr>
-      </p:sp>
-      <p:sp>
-        <p:nvSpPr>
-          <p:cNvPr id="13" name="Text 11"/>
-          <p:cNvSpPr/>
-          <p:nvPr/>
-        </p:nvSpPr>
-        <p:spPr>
-          <a:xfrm>
-            <a:off x="457200" y="4005072"/>
-            <a:ext cx="8229600" cy="320040"/>
-          </a:xfrm>
-          <a:prstGeom prst="rect">
-            <a:avLst/>
-          </a:prstGeom>
-          <a:noFill/>
-          <a:ln/>
-        </p:spPr>
-        <p:txBody>
-          <a:bodyPr wrap="square" rtlCol="0" anchor="ctr"/>
-          <a:lstStyle/>
-          <a:p>
-            <a:pPr marL="0" indent="0" algn="ctr">
-              <a:buNone/>
-            </a:pPr>
-            <a:r>
-              <a:rPr lang="en-US" sz="1400" dirty="0">
-                <a:solidFill>
-                  <a:srgbClr val="000000"/>
-                </a:solidFill>
-                <a:ea typeface="Times New Roman" pitchFamily="34" charset="-122"/>
-                <a:cs typeface="Times New Roman" pitchFamily="34" charset="-120"/>
-              </a:rPr>
-              <a:t>Казань, 2026 г.</a:t>
-            </a:r>
-            <a:endParaRPr lang="en-US" sz="1400" dirty="0"/>
+              <a:rPr lang="ru-RU" sz="1600" dirty="0">
+                <a:cs typeface="Calibri"/>
+              </a:rPr>
+              <a:t>Валитова Н. Л.</a:t>
+            </a:r>
+          </a:p>
+          <a:p>
+            <a:endParaRPr lang="ru-RU" sz="1600" dirty="0"/>
           </a:p>
         </p:txBody>
       </p:sp>
@@ -2723,7 +3090,7 @@
 
 <file path=ppt/slides/slide10.xml><?xml version="1.0" encoding="utf-8"?>
 <p:sld xmlns:a="http://schemas.openxmlformats.org/drawingml/2006/main" xmlns:r="http://schemas.openxmlformats.org/officeDocument/2006/relationships" xmlns:p="http://schemas.openxmlformats.org/presentationml/2006/main">
-  <p:cSld name="Slide 12">
+  <p:cSld>
     <p:spTree>
       <p:nvGrpSpPr>
         <p:cNvPr id="1" name=""/>
@@ -2763,7 +3130,7 @@
               <a:rPr lang="en-US" sz="2800" b="1" dirty="0">
                 <a:cs typeface="Times New Roman" pitchFamily="34" charset="-120"/>
               </a:rPr>
-              <a:t>12. Схема базы данных</a:t>
+              <a:t>9. Диаграмма вариантов использования</a:t>
             </a:r>
           </a:p>
         </p:txBody>
@@ -2795,10 +3162,10 @@
       </p:sp>
       <p:sp>
         <p:nvSpPr>
-          <p:cNvPr id="9" name="Text 2">
+          <p:cNvPr id="6" name="Text 2">
             <a:extLst>
               <a:ext uri="{FF2B5EF4-FFF2-40B4-BE49-F238E27FC236}">
-                <a16:creationId xmlns:a16="http://schemas.microsoft.com/office/drawing/2014/main" id="{9D1E9CBE-7FFF-4B62-A01A-1478B0F8B87C}"/>
+                <a16:creationId xmlns:a16="http://schemas.microsoft.com/office/drawing/2014/main" id="{352B1A3B-E483-4B5B-A313-506294D37B05}"/>
               </a:ext>
             </a:extLst>
           </p:cNvPr>
@@ -2807,8 +3174,8 @@
         </p:nvSpPr>
         <p:spPr>
           <a:xfrm>
-            <a:off x="8173329" y="108000"/>
-            <a:ext cx="790671" cy="288000"/>
+            <a:off x="8280000" y="4680000"/>
+            <a:ext cx="468000" cy="360000"/>
           </a:xfrm>
           <a:prstGeom prst="rect">
             <a:avLst/>
@@ -2820,24 +3187,493 @@
           <a:bodyPr wrap="square" rtlCol="0" anchor="ctr"/>
           <a:lstStyle/>
           <a:p>
-            <a:pPr marL="0" indent="0" algn="r">
-              <a:buNone/>
-            </a:pPr>
-            <a:r>
-              <a:rPr lang="ru-RU" sz="1600" dirty="0">
-                <a:ea typeface="Times New Roman" pitchFamily="34" charset="-122"/>
+            <a:pPr algn="r"/>
+            <a:r>
+              <a:rPr lang="ru-RU" sz="2000" dirty="0">
                 <a:cs typeface="Times New Roman" pitchFamily="34" charset="-120"/>
               </a:rPr>
               <a:t>10</a:t>
             </a:r>
-            <a:r>
-              <a:rPr lang="en-US" sz="1600" dirty="0">
-                <a:ea typeface="Times New Roman" pitchFamily="34" charset="-122"/>
-                <a:cs typeface="Times New Roman" pitchFamily="34" charset="-120"/>
-              </a:rPr>
-              <a:t> / 20</a:t>
-            </a:r>
-            <a:endParaRPr lang="en-US" sz="1600" dirty="0"/>
+            <a:endParaRPr lang="en-US" sz="2000" dirty="0">
+              <a:cs typeface="Times New Roman" pitchFamily="34" charset="-120"/>
+            </a:endParaRPr>
+          </a:p>
+        </p:txBody>
+      </p:sp>
+      <p:pic>
+        <p:nvPicPr>
+          <p:cNvPr id="10" name="Рисунок 9">
+            <a:extLst>
+              <a:ext uri="{FF2B5EF4-FFF2-40B4-BE49-F238E27FC236}">
+                <a16:creationId xmlns:a16="http://schemas.microsoft.com/office/drawing/2014/main" id="{C22DEEC9-923C-4CA2-B6ED-3955BEBD47D3}"/>
+              </a:ext>
+            </a:extLst>
+          </p:cNvPr>
+          <p:cNvPicPr>
+            <a:picLocks noChangeAspect="1"/>
+          </p:cNvPicPr>
+          <p:nvPr/>
+        </p:nvPicPr>
+        <p:blipFill>
+          <a:blip r:embed="rId3"/>
+          <a:stretch>
+            <a:fillRect/>
+          </a:stretch>
+        </p:blipFill>
+        <p:spPr>
+          <a:xfrm>
+            <a:off x="893339" y="632150"/>
+            <a:ext cx="7357321" cy="4403350"/>
+          </a:xfrm>
+          <a:prstGeom prst="rect">
+            <a:avLst/>
+          </a:prstGeom>
+        </p:spPr>
+      </p:pic>
+    </p:spTree>
+    <p:extLst>
+      <p:ext uri="{BB962C8B-B14F-4D97-AF65-F5344CB8AC3E}">
+        <p14:creationId xmlns:p14="http://schemas.microsoft.com/office/powerpoint/2010/main" val="230554074"/>
+      </p:ext>
+    </p:extLst>
+  </p:cSld>
+  <p:clrMapOvr>
+    <a:masterClrMapping/>
+  </p:clrMapOvr>
+</p:sld>
+</file>
+
+<file path=ppt/slides/slide11.xml><?xml version="1.0" encoding="utf-8"?>
+<p:sld xmlns:a="http://schemas.openxmlformats.org/drawingml/2006/main" xmlns:r="http://schemas.openxmlformats.org/officeDocument/2006/relationships" xmlns:p="http://schemas.openxmlformats.org/presentationml/2006/main">
+  <p:cSld>
+    <p:spTree>
+      <p:nvGrpSpPr>
+        <p:cNvPr id="1" name=""/>
+        <p:cNvGrpSpPr/>
+        <p:nvPr/>
+      </p:nvGrpSpPr>
+      <p:grpSpPr>
+        <a:xfrm>
+          <a:off x="0" y="0"/>
+          <a:ext cx="0" cy="0"/>
+          <a:chOff x="0" y="0"/>
+          <a:chExt cx="0" cy="0"/>
+        </a:xfrm>
+      </p:grpSpPr>
+      <p:sp>
+        <p:nvSpPr>
+          <p:cNvPr id="2" name="Text 0"/>
+          <p:cNvSpPr/>
+          <p:nvPr/>
+        </p:nvSpPr>
+        <p:spPr>
+          <a:xfrm>
+            <a:off x="360000" y="36000"/>
+            <a:ext cx="8460000" cy="396000"/>
+          </a:xfrm>
+          <a:prstGeom prst="rect">
+            <a:avLst/>
+          </a:prstGeom>
+          <a:noFill/>
+          <a:ln/>
+        </p:spPr>
+        <p:txBody>
+          <a:bodyPr wrap="square" rtlCol="0" anchor="ctr"/>
+          <a:lstStyle/>
+          <a:p>
+            <a:r>
+              <a:rPr lang="en-US" sz="2800" b="1" dirty="0">
+                <a:cs typeface="Times New Roman" pitchFamily="34" charset="-120"/>
+              </a:rPr>
+              <a:t>9. Диаграмма вариантов использования</a:t>
+            </a:r>
+          </a:p>
+        </p:txBody>
+      </p:sp>
+      <p:sp>
+        <p:nvSpPr>
+          <p:cNvPr id="3" name="Shape 1"/>
+          <p:cNvSpPr/>
+          <p:nvPr/>
+        </p:nvSpPr>
+        <p:spPr>
+          <a:xfrm>
+            <a:off x="432000" y="468000"/>
+            <a:ext cx="8280000" cy="27432"/>
+          </a:xfrm>
+          <a:prstGeom prst="rect">
+            <a:avLst/>
+          </a:prstGeom>
+          <a:solidFill>
+            <a:srgbClr val="000000"/>
+          </a:solidFill>
+          <a:ln w="12700">
+            <a:solidFill>
+              <a:srgbClr val="000000"/>
+            </a:solidFill>
+            <a:prstDash val="solid"/>
+          </a:ln>
+        </p:spPr>
+      </p:sp>
+      <p:sp>
+        <p:nvSpPr>
+          <p:cNvPr id="6" name="Text 2">
+            <a:extLst>
+              <a:ext uri="{FF2B5EF4-FFF2-40B4-BE49-F238E27FC236}">
+                <a16:creationId xmlns:a16="http://schemas.microsoft.com/office/drawing/2014/main" id="{352B1A3B-E483-4B5B-A313-506294D37B05}"/>
+              </a:ext>
+            </a:extLst>
+          </p:cNvPr>
+          <p:cNvSpPr/>
+          <p:nvPr/>
+        </p:nvSpPr>
+        <p:spPr>
+          <a:xfrm>
+            <a:off x="8280000" y="4680000"/>
+            <a:ext cx="468000" cy="360000"/>
+          </a:xfrm>
+          <a:prstGeom prst="rect">
+            <a:avLst/>
+          </a:prstGeom>
+          <a:noFill/>
+          <a:ln/>
+        </p:spPr>
+        <p:txBody>
+          <a:bodyPr wrap="square" rtlCol="0" anchor="ctr"/>
+          <a:lstStyle/>
+          <a:p>
+            <a:pPr algn="r"/>
+            <a:r>
+              <a:rPr lang="ru-RU" sz="2000" dirty="0">
+                <a:cs typeface="Times New Roman" pitchFamily="34" charset="-120"/>
+              </a:rPr>
+              <a:t>11</a:t>
+            </a:r>
+            <a:endParaRPr lang="en-US" sz="2000" dirty="0">
+              <a:cs typeface="Times New Roman" pitchFamily="34" charset="-120"/>
+            </a:endParaRPr>
+          </a:p>
+        </p:txBody>
+      </p:sp>
+      <p:pic>
+        <p:nvPicPr>
+          <p:cNvPr id="10" name="Рисунок 9">
+            <a:extLst>
+              <a:ext uri="{FF2B5EF4-FFF2-40B4-BE49-F238E27FC236}">
+                <a16:creationId xmlns:a16="http://schemas.microsoft.com/office/drawing/2014/main" id="{C22DEEC9-923C-4CA2-B6ED-3955BEBD47D3}"/>
+              </a:ext>
+            </a:extLst>
+          </p:cNvPr>
+          <p:cNvPicPr>
+            <a:picLocks noChangeAspect="1"/>
+          </p:cNvPicPr>
+          <p:nvPr/>
+        </p:nvPicPr>
+        <p:blipFill>
+          <a:blip r:embed="rId3"/>
+          <a:stretch>
+            <a:fillRect/>
+          </a:stretch>
+        </p:blipFill>
+        <p:spPr>
+          <a:xfrm>
+            <a:off x="280997" y="632151"/>
+            <a:ext cx="8582005" cy="4359658"/>
+          </a:xfrm>
+          <a:prstGeom prst="rect">
+            <a:avLst/>
+          </a:prstGeom>
+        </p:spPr>
+      </p:pic>
+    </p:spTree>
+    <p:extLst>
+      <p:ext uri="{BB962C8B-B14F-4D97-AF65-F5344CB8AC3E}">
+        <p14:creationId xmlns:p14="http://schemas.microsoft.com/office/powerpoint/2010/main" val="1969140475"/>
+      </p:ext>
+    </p:extLst>
+  </p:cSld>
+  <p:clrMapOvr>
+    <a:masterClrMapping/>
+  </p:clrMapOvr>
+</p:sld>
+</file>
+
+<file path=ppt/slides/slide12.xml><?xml version="1.0" encoding="utf-8"?>
+<p:sld xmlns:a="http://schemas.openxmlformats.org/drawingml/2006/main" xmlns:r="http://schemas.openxmlformats.org/officeDocument/2006/relationships" xmlns:p="http://schemas.openxmlformats.org/presentationml/2006/main">
+  <p:cSld>
+    <p:spTree>
+      <p:nvGrpSpPr>
+        <p:cNvPr id="1" name=""/>
+        <p:cNvGrpSpPr/>
+        <p:nvPr/>
+      </p:nvGrpSpPr>
+      <p:grpSpPr>
+        <a:xfrm>
+          <a:off x="0" y="0"/>
+          <a:ext cx="0" cy="0"/>
+          <a:chOff x="0" y="0"/>
+          <a:chExt cx="0" cy="0"/>
+        </a:xfrm>
+      </p:grpSpPr>
+      <p:sp>
+        <p:nvSpPr>
+          <p:cNvPr id="2" name="Text 0"/>
+          <p:cNvSpPr/>
+          <p:nvPr/>
+        </p:nvSpPr>
+        <p:spPr>
+          <a:xfrm>
+            <a:off x="360000" y="36000"/>
+            <a:ext cx="8460000" cy="396000"/>
+          </a:xfrm>
+          <a:prstGeom prst="rect">
+            <a:avLst/>
+          </a:prstGeom>
+          <a:noFill/>
+          <a:ln/>
+        </p:spPr>
+        <p:txBody>
+          <a:bodyPr wrap="square" rtlCol="0" anchor="ctr"/>
+          <a:lstStyle/>
+          <a:p>
+            <a:r>
+              <a:rPr lang="en-US" sz="2800" b="1" dirty="0">
+                <a:cs typeface="Times New Roman" pitchFamily="34" charset="-120"/>
+              </a:rPr>
+              <a:t>9. Диаграмма вариантов использования</a:t>
+            </a:r>
+          </a:p>
+        </p:txBody>
+      </p:sp>
+      <p:sp>
+        <p:nvSpPr>
+          <p:cNvPr id="3" name="Shape 1"/>
+          <p:cNvSpPr/>
+          <p:nvPr/>
+        </p:nvSpPr>
+        <p:spPr>
+          <a:xfrm>
+            <a:off x="432000" y="468000"/>
+            <a:ext cx="8280000" cy="27432"/>
+          </a:xfrm>
+          <a:prstGeom prst="rect">
+            <a:avLst/>
+          </a:prstGeom>
+          <a:solidFill>
+            <a:srgbClr val="000000"/>
+          </a:solidFill>
+          <a:ln w="12700">
+            <a:solidFill>
+              <a:srgbClr val="000000"/>
+            </a:solidFill>
+            <a:prstDash val="solid"/>
+          </a:ln>
+        </p:spPr>
+      </p:sp>
+      <p:sp>
+        <p:nvSpPr>
+          <p:cNvPr id="6" name="Text 2">
+            <a:extLst>
+              <a:ext uri="{FF2B5EF4-FFF2-40B4-BE49-F238E27FC236}">
+                <a16:creationId xmlns:a16="http://schemas.microsoft.com/office/drawing/2014/main" id="{352B1A3B-E483-4B5B-A313-506294D37B05}"/>
+              </a:ext>
+            </a:extLst>
+          </p:cNvPr>
+          <p:cNvSpPr/>
+          <p:nvPr/>
+        </p:nvSpPr>
+        <p:spPr>
+          <a:xfrm>
+            <a:off x="8280000" y="4680000"/>
+            <a:ext cx="468000" cy="360000"/>
+          </a:xfrm>
+          <a:prstGeom prst="rect">
+            <a:avLst/>
+          </a:prstGeom>
+          <a:noFill/>
+          <a:ln/>
+        </p:spPr>
+        <p:txBody>
+          <a:bodyPr wrap="square" rtlCol="0" anchor="ctr"/>
+          <a:lstStyle/>
+          <a:p>
+            <a:pPr algn="r"/>
+            <a:r>
+              <a:rPr lang="ru-RU" sz="2000" dirty="0">
+                <a:cs typeface="Times New Roman" pitchFamily="34" charset="-120"/>
+              </a:rPr>
+              <a:t>12</a:t>
+            </a:r>
+            <a:endParaRPr lang="en-US" sz="2000" dirty="0">
+              <a:cs typeface="Times New Roman" pitchFamily="34" charset="-120"/>
+            </a:endParaRPr>
+          </a:p>
+        </p:txBody>
+      </p:sp>
+      <p:pic>
+        <p:nvPicPr>
+          <p:cNvPr id="10" name="Рисунок 9">
+            <a:extLst>
+              <a:ext uri="{FF2B5EF4-FFF2-40B4-BE49-F238E27FC236}">
+                <a16:creationId xmlns:a16="http://schemas.microsoft.com/office/drawing/2014/main" id="{C22DEEC9-923C-4CA2-B6ED-3955BEBD47D3}"/>
+              </a:ext>
+            </a:extLst>
+          </p:cNvPr>
+          <p:cNvPicPr>
+            <a:picLocks noChangeAspect="1"/>
+          </p:cNvPicPr>
+          <p:nvPr/>
+        </p:nvPicPr>
+        <p:blipFill>
+          <a:blip r:embed="rId3"/>
+          <a:stretch>
+            <a:fillRect/>
+          </a:stretch>
+        </p:blipFill>
+        <p:spPr>
+          <a:xfrm>
+            <a:off x="567504" y="632150"/>
+            <a:ext cx="8008991" cy="4403350"/>
+          </a:xfrm>
+          <a:prstGeom prst="rect">
+            <a:avLst/>
+          </a:prstGeom>
+        </p:spPr>
+      </p:pic>
+    </p:spTree>
+    <p:extLst>
+      <p:ext uri="{BB962C8B-B14F-4D97-AF65-F5344CB8AC3E}">
+        <p14:creationId xmlns:p14="http://schemas.microsoft.com/office/powerpoint/2010/main" val="3857794812"/>
+      </p:ext>
+    </p:extLst>
+  </p:cSld>
+  <p:clrMapOvr>
+    <a:masterClrMapping/>
+  </p:clrMapOvr>
+</p:sld>
+</file>
+
+<file path=ppt/slides/slide13.xml><?xml version="1.0" encoding="utf-8"?>
+<p:sld xmlns:a="http://schemas.openxmlformats.org/drawingml/2006/main" xmlns:r="http://schemas.openxmlformats.org/officeDocument/2006/relationships" xmlns:p="http://schemas.openxmlformats.org/presentationml/2006/main">
+  <p:cSld name="Slide 12">
+    <p:spTree>
+      <p:nvGrpSpPr>
+        <p:cNvPr id="1" name=""/>
+        <p:cNvGrpSpPr/>
+        <p:nvPr/>
+      </p:nvGrpSpPr>
+      <p:grpSpPr>
+        <a:xfrm>
+          <a:off x="0" y="0"/>
+          <a:ext cx="0" cy="0"/>
+          <a:chOff x="0" y="0"/>
+          <a:chExt cx="0" cy="0"/>
+        </a:xfrm>
+      </p:grpSpPr>
+      <p:sp>
+        <p:nvSpPr>
+          <p:cNvPr id="2" name="Text 0"/>
+          <p:cNvSpPr/>
+          <p:nvPr/>
+        </p:nvSpPr>
+        <p:spPr>
+          <a:xfrm>
+            <a:off x="360000" y="36000"/>
+            <a:ext cx="8460000" cy="396000"/>
+          </a:xfrm>
+          <a:prstGeom prst="rect">
+            <a:avLst/>
+          </a:prstGeom>
+          <a:noFill/>
+          <a:ln/>
+        </p:spPr>
+        <p:txBody>
+          <a:bodyPr wrap="square" rtlCol="0" anchor="ctr"/>
+          <a:lstStyle/>
+          <a:p>
+            <a:r>
+              <a:rPr lang="en-US" sz="2800" b="1" dirty="0">
+                <a:cs typeface="Times New Roman" pitchFamily="34" charset="-120"/>
+              </a:rPr>
+              <a:t>1</a:t>
+            </a:r>
+            <a:r>
+              <a:rPr lang="ru-RU" sz="2800" b="1" dirty="0">
+                <a:cs typeface="Times New Roman" pitchFamily="34" charset="-120"/>
+              </a:rPr>
+              <a:t>0</a:t>
+            </a:r>
+            <a:r>
+              <a:rPr lang="en-US" sz="2800" b="1" dirty="0">
+                <a:cs typeface="Times New Roman" pitchFamily="34" charset="-120"/>
+              </a:rPr>
+              <a:t>. Схема базы данных</a:t>
+            </a:r>
+          </a:p>
+        </p:txBody>
+      </p:sp>
+      <p:sp>
+        <p:nvSpPr>
+          <p:cNvPr id="3" name="Shape 1"/>
+          <p:cNvSpPr/>
+          <p:nvPr/>
+        </p:nvSpPr>
+        <p:spPr>
+          <a:xfrm>
+            <a:off x="432000" y="468000"/>
+            <a:ext cx="8280000" cy="27432"/>
+          </a:xfrm>
+          <a:prstGeom prst="rect">
+            <a:avLst/>
+          </a:prstGeom>
+          <a:solidFill>
+            <a:srgbClr val="000000"/>
+          </a:solidFill>
+          <a:ln w="12700">
+            <a:solidFill>
+              <a:srgbClr val="000000"/>
+            </a:solidFill>
+            <a:prstDash val="solid"/>
+          </a:ln>
+        </p:spPr>
+      </p:sp>
+      <p:sp>
+        <p:nvSpPr>
+          <p:cNvPr id="9" name="Text 2">
+            <a:extLst>
+              <a:ext uri="{FF2B5EF4-FFF2-40B4-BE49-F238E27FC236}">
+                <a16:creationId xmlns:a16="http://schemas.microsoft.com/office/drawing/2014/main" id="{9D1E9CBE-7FFF-4B62-A01A-1478B0F8B87C}"/>
+              </a:ext>
+            </a:extLst>
+          </p:cNvPr>
+          <p:cNvSpPr/>
+          <p:nvPr/>
+        </p:nvSpPr>
+        <p:spPr>
+          <a:xfrm>
+            <a:off x="8280000" y="4680000"/>
+            <a:ext cx="468000" cy="360000"/>
+          </a:xfrm>
+          <a:prstGeom prst="rect">
+            <a:avLst/>
+          </a:prstGeom>
+          <a:noFill/>
+          <a:ln/>
+        </p:spPr>
+        <p:txBody>
+          <a:bodyPr wrap="square" rtlCol="0" anchor="ctr"/>
+          <a:lstStyle/>
+          <a:p>
+            <a:pPr algn="r"/>
+            <a:r>
+              <a:rPr lang="ru-RU" sz="2000" dirty="0">
+                <a:cs typeface="Times New Roman" pitchFamily="34" charset="-120"/>
+              </a:rPr>
+              <a:t>13</a:t>
+            </a:r>
+            <a:endParaRPr lang="en-US" sz="2000" dirty="0">
+              <a:cs typeface="Times New Roman" pitchFamily="34" charset="-120"/>
+            </a:endParaRPr>
           </a:p>
         </p:txBody>
       </p:sp>
@@ -2879,7 +3715,7 @@
 </p:sld>
 </file>
 
-<file path=ppt/slides/slide11.xml><?xml version="1.0" encoding="utf-8"?>
+<file path=ppt/slides/slide14.xml><?xml version="1.0" encoding="utf-8"?>
 <p:sld xmlns:a="http://schemas.openxmlformats.org/drawingml/2006/main" xmlns:r="http://schemas.openxmlformats.org/officeDocument/2006/relationships" xmlns:p="http://schemas.openxmlformats.org/presentationml/2006/main">
   <p:cSld name="Slide 10">
     <p:spTree>
@@ -2921,7 +3757,19 @@
               <a:rPr lang="en-US" sz="2800" b="1" dirty="0">
                 <a:cs typeface="Times New Roman" pitchFamily="34" charset="-120"/>
               </a:rPr>
-              <a:t>10. Жизненный цикл: запрос на научное руководство</a:t>
+              <a:t>1</a:t>
+            </a:r>
+            <a:r>
+              <a:rPr lang="ru-RU" sz="2800" b="1" dirty="0">
+                <a:cs typeface="Times New Roman" pitchFamily="34" charset="-120"/>
+              </a:rPr>
+              <a:t>1</a:t>
+            </a:r>
+            <a:r>
+              <a:rPr lang="en-US" sz="2800" b="1" dirty="0">
+                <a:cs typeface="Times New Roman" pitchFamily="34" charset="-120"/>
+              </a:rPr>
+              <a:t>. Жизненный цикл: запрос на научное руководство</a:t>
             </a:r>
           </a:p>
         </p:txBody>
@@ -2953,7 +3801,7 @@
       </p:sp>
       <p:pic>
         <p:nvPicPr>
-          <p:cNvPr id="5" name="Image 0" descr="C:\Users\Aydar.Ilin\Documents\Cods\AcademicTopicSelectionService\docs\lc_supervisor_request.drawio.png"/>
+          <p:cNvPr id="5" name="Image 0"/>
           <p:cNvPicPr>
             <a:picLocks noChangeAspect="1"/>
           </p:cNvPicPr>
@@ -2967,8 +3815,8 @@
         </p:blipFill>
         <p:spPr>
           <a:xfrm>
-            <a:off x="570266" y="979864"/>
-            <a:ext cx="8003468" cy="3472472"/>
+            <a:off x="1171372" y="979864"/>
+            <a:ext cx="6801255" cy="3472472"/>
           </a:xfrm>
           <a:prstGeom prst="rect">
             <a:avLst/>
@@ -2989,8 +3837,8 @@
         </p:nvSpPr>
         <p:spPr>
           <a:xfrm>
-            <a:off x="8173329" y="540000"/>
-            <a:ext cx="790671" cy="288000"/>
+            <a:off x="8280000" y="4680000"/>
+            <a:ext cx="468000" cy="360000"/>
           </a:xfrm>
           <a:prstGeom prst="rect">
             <a:avLst/>
@@ -3002,24 +3850,16 @@
           <a:bodyPr wrap="square" rtlCol="0" anchor="ctr"/>
           <a:lstStyle/>
           <a:p>
-            <a:pPr marL="0" indent="0" algn="r">
-              <a:buNone/>
-            </a:pPr>
-            <a:r>
-              <a:rPr lang="ru-RU" sz="1600" dirty="0">
-                <a:ea typeface="Times New Roman" pitchFamily="34" charset="-122"/>
-                <a:cs typeface="Times New Roman" pitchFamily="34" charset="-120"/>
-              </a:rPr>
-              <a:t>11</a:t>
-            </a:r>
-            <a:r>
-              <a:rPr lang="en-US" sz="1600" dirty="0">
-                <a:ea typeface="Times New Roman" pitchFamily="34" charset="-122"/>
-                <a:cs typeface="Times New Roman" pitchFamily="34" charset="-120"/>
-              </a:rPr>
-              <a:t> / 20</a:t>
-            </a:r>
-            <a:endParaRPr lang="en-US" sz="1600" dirty="0"/>
+            <a:pPr algn="r"/>
+            <a:r>
+              <a:rPr lang="ru-RU" sz="2000" dirty="0">
+                <a:cs typeface="Times New Roman" pitchFamily="34" charset="-120"/>
+              </a:rPr>
+              <a:t>14</a:t>
+            </a:r>
+            <a:endParaRPr lang="en-US" sz="2000" dirty="0">
+              <a:cs typeface="Times New Roman" pitchFamily="34" charset="-120"/>
+            </a:endParaRPr>
           </a:p>
         </p:txBody>
       </p:sp>
@@ -3031,7 +3871,7 @@
 </p:sld>
 </file>
 
-<file path=ppt/slides/slide12.xml><?xml version="1.0" encoding="utf-8"?>
+<file path=ppt/slides/slide15.xml><?xml version="1.0" encoding="utf-8"?>
 <p:sld xmlns:a="http://schemas.openxmlformats.org/drawingml/2006/main" xmlns:r="http://schemas.openxmlformats.org/officeDocument/2006/relationships" xmlns:p="http://schemas.openxmlformats.org/presentationml/2006/main">
   <p:cSld name="Slide 11">
     <p:spTree>
@@ -3073,7 +3913,19 @@
               <a:rPr lang="en-US" sz="2800" b="1" dirty="0">
                 <a:cs typeface="Times New Roman" pitchFamily="34" charset="-120"/>
               </a:rPr>
-              <a:t>11. Жизненный цикл: заявка на тему ВКР</a:t>
+              <a:t>1</a:t>
+            </a:r>
+            <a:r>
+              <a:rPr lang="ru-RU" sz="2800" b="1" dirty="0">
+                <a:cs typeface="Times New Roman" pitchFamily="34" charset="-120"/>
+              </a:rPr>
+              <a:t>2</a:t>
+            </a:r>
+            <a:r>
+              <a:rPr lang="en-US" sz="2800" b="1" dirty="0">
+                <a:cs typeface="Times New Roman" pitchFamily="34" charset="-120"/>
+              </a:rPr>
+              <a:t>. Жизненный цикл: заявка на тему ВКР</a:t>
             </a:r>
           </a:p>
         </p:txBody>
@@ -3119,8 +3971,8 @@
         </p:blipFill>
         <p:spPr>
           <a:xfrm>
-            <a:off x="1009360" y="758561"/>
-            <a:ext cx="7125280" cy="3937654"/>
+            <a:off x="1920992" y="758561"/>
+            <a:ext cx="5302016" cy="3937654"/>
           </a:xfrm>
           <a:prstGeom prst="rect">
             <a:avLst/>
@@ -3141,8 +3993,8 @@
         </p:nvSpPr>
         <p:spPr>
           <a:xfrm>
-            <a:off x="8173329" y="108000"/>
-            <a:ext cx="790671" cy="288000"/>
+            <a:off x="8280000" y="4680000"/>
+            <a:ext cx="468000" cy="360000"/>
           </a:xfrm>
           <a:prstGeom prst="rect">
             <a:avLst/>
@@ -3154,24 +4006,16 @@
           <a:bodyPr wrap="square" rtlCol="0" anchor="ctr"/>
           <a:lstStyle/>
           <a:p>
-            <a:pPr marL="0" indent="0" algn="r">
-              <a:buNone/>
-            </a:pPr>
-            <a:r>
-              <a:rPr lang="ru-RU" sz="1600" dirty="0">
-                <a:ea typeface="Times New Roman" pitchFamily="34" charset="-122"/>
-                <a:cs typeface="Times New Roman" pitchFamily="34" charset="-120"/>
-              </a:rPr>
-              <a:t>1</a:t>
-            </a:r>
-            <a:r>
-              <a:rPr lang="en-US" sz="1600" dirty="0">
-                <a:ea typeface="Times New Roman" pitchFamily="34" charset="-122"/>
-                <a:cs typeface="Times New Roman" pitchFamily="34" charset="-120"/>
-              </a:rPr>
-              <a:t>2 / 20</a:t>
-            </a:r>
-            <a:endParaRPr lang="en-US" sz="1600" dirty="0"/>
+            <a:pPr algn="r"/>
+            <a:r>
+              <a:rPr lang="ru-RU" sz="2000" dirty="0">
+                <a:cs typeface="Times New Roman" pitchFamily="34" charset="-120"/>
+              </a:rPr>
+              <a:t>15</a:t>
+            </a:r>
+            <a:endParaRPr lang="en-US" sz="2000" dirty="0">
+              <a:cs typeface="Times New Roman" pitchFamily="34" charset="-120"/>
+            </a:endParaRPr>
           </a:p>
         </p:txBody>
       </p:sp>
@@ -3183,7 +4027,7 @@
 </p:sld>
 </file>
 
-<file path=ppt/slides/slide13.xml><?xml version="1.0" encoding="utf-8"?>
+<file path=ppt/slides/slide16.xml><?xml version="1.0" encoding="utf-8"?>
 <p:sld xmlns:a="http://schemas.openxmlformats.org/drawingml/2006/main" xmlns:r="http://schemas.openxmlformats.org/officeDocument/2006/relationships" xmlns:p="http://schemas.openxmlformats.org/presentationml/2006/main">
   <p:cSld name="Slide 13">
     <p:spTree>
@@ -3307,8 +4151,8 @@
         </p:nvSpPr>
         <p:spPr>
           <a:xfrm>
-            <a:off x="8173329" y="108000"/>
-            <a:ext cx="790671" cy="288000"/>
+            <a:off x="8280000" y="4680000"/>
+            <a:ext cx="468000" cy="360000"/>
           </a:xfrm>
           <a:prstGeom prst="rect">
             <a:avLst/>
@@ -3320,24 +4164,16 @@
           <a:bodyPr wrap="square" rtlCol="0" anchor="ctr"/>
           <a:lstStyle/>
           <a:p>
-            <a:pPr marL="0" indent="0" algn="r">
-              <a:buNone/>
-            </a:pPr>
-            <a:r>
-              <a:rPr lang="ru-RU" sz="1600" dirty="0">
-                <a:ea typeface="Times New Roman" pitchFamily="34" charset="-122"/>
-                <a:cs typeface="Times New Roman" pitchFamily="34" charset="-120"/>
-              </a:rPr>
-              <a:t>13</a:t>
-            </a:r>
-            <a:r>
-              <a:rPr lang="en-US" sz="1600" dirty="0">
-                <a:ea typeface="Times New Roman" pitchFamily="34" charset="-122"/>
-                <a:cs typeface="Times New Roman" pitchFamily="34" charset="-120"/>
-              </a:rPr>
-              <a:t> / 20</a:t>
-            </a:r>
-            <a:endParaRPr lang="en-US" sz="1600" dirty="0"/>
+            <a:pPr algn="r"/>
+            <a:r>
+              <a:rPr lang="ru-RU" sz="2000" dirty="0">
+                <a:cs typeface="Times New Roman" pitchFamily="34" charset="-120"/>
+              </a:rPr>
+              <a:t>16</a:t>
+            </a:r>
+            <a:endParaRPr lang="en-US" sz="2000" dirty="0">
+              <a:cs typeface="Times New Roman" pitchFamily="34" charset="-120"/>
+            </a:endParaRPr>
           </a:p>
         </p:txBody>
       </p:sp>
@@ -3349,7 +4185,7 @@
 </p:sld>
 </file>
 
-<file path=ppt/slides/slide14.xml><?xml version="1.0" encoding="utf-8"?>
+<file path=ppt/slides/slide17.xml><?xml version="1.0" encoding="utf-8"?>
 <p:sld xmlns:a="http://schemas.openxmlformats.org/drawingml/2006/main" xmlns:r="http://schemas.openxmlformats.org/officeDocument/2006/relationships" xmlns:p="http://schemas.openxmlformats.org/presentationml/2006/main">
   <p:cSld>
     <p:spTree>
@@ -3464,8 +4300,8 @@
         </p:nvSpPr>
         <p:spPr>
           <a:xfrm>
-            <a:off x="8173329" y="108000"/>
-            <a:ext cx="790671" cy="288000"/>
+            <a:off x="8280000" y="4680000"/>
+            <a:ext cx="468000" cy="360000"/>
           </a:xfrm>
           <a:prstGeom prst="rect">
             <a:avLst/>
@@ -3477,24 +4313,16 @@
           <a:bodyPr wrap="square" rtlCol="0" anchor="ctr"/>
           <a:lstStyle/>
           <a:p>
-            <a:pPr marL="0" indent="0" algn="r">
-              <a:buNone/>
-            </a:pPr>
-            <a:r>
-              <a:rPr lang="ru-RU" sz="1600" dirty="0">
-                <a:ea typeface="Times New Roman" pitchFamily="34" charset="-122"/>
-                <a:cs typeface="Times New Roman" pitchFamily="34" charset="-120"/>
-              </a:rPr>
-              <a:t>14</a:t>
-            </a:r>
-            <a:r>
-              <a:rPr lang="en-US" sz="1600" dirty="0">
-                <a:ea typeface="Times New Roman" pitchFamily="34" charset="-122"/>
-                <a:cs typeface="Times New Roman" pitchFamily="34" charset="-120"/>
-              </a:rPr>
-              <a:t> / 20</a:t>
-            </a:r>
-            <a:endParaRPr lang="en-US" sz="1600" dirty="0"/>
+            <a:pPr algn="r"/>
+            <a:r>
+              <a:rPr lang="ru-RU" sz="2000" dirty="0">
+                <a:cs typeface="Times New Roman" pitchFamily="34" charset="-120"/>
+              </a:rPr>
+              <a:t>17</a:t>
+            </a:r>
+            <a:endParaRPr lang="en-US" sz="2000" dirty="0">
+              <a:cs typeface="Times New Roman" pitchFamily="34" charset="-120"/>
+            </a:endParaRPr>
           </a:p>
         </p:txBody>
       </p:sp>
@@ -3511,7 +4339,7 @@
 </p:sld>
 </file>
 
-<file path=ppt/slides/slide15.xml><?xml version="1.0" encoding="utf-8"?>
+<file path=ppt/slides/slide18.xml><?xml version="1.0" encoding="utf-8"?>
 <p:sld xmlns:a="http://schemas.openxmlformats.org/drawingml/2006/main" xmlns:r="http://schemas.openxmlformats.org/officeDocument/2006/relationships" xmlns:p="http://schemas.openxmlformats.org/presentationml/2006/main">
   <p:cSld>
     <p:spTree>
@@ -3632,8 +4460,8 @@
         </p:nvSpPr>
         <p:spPr>
           <a:xfrm>
-            <a:off x="8173329" y="108000"/>
-            <a:ext cx="790671" cy="288000"/>
+            <a:off x="8280000" y="4680000"/>
+            <a:ext cx="468000" cy="360000"/>
           </a:xfrm>
           <a:prstGeom prst="rect">
             <a:avLst/>
@@ -3645,24 +4473,16 @@
           <a:bodyPr wrap="square" rtlCol="0" anchor="ctr"/>
           <a:lstStyle/>
           <a:p>
-            <a:pPr marL="0" indent="0" algn="r">
-              <a:buNone/>
-            </a:pPr>
-            <a:r>
-              <a:rPr lang="ru-RU" sz="1600" dirty="0">
-                <a:ea typeface="Times New Roman" pitchFamily="34" charset="-122"/>
-                <a:cs typeface="Times New Roman" pitchFamily="34" charset="-120"/>
-              </a:rPr>
-              <a:t>15</a:t>
-            </a:r>
-            <a:r>
-              <a:rPr lang="en-US" sz="1600" dirty="0">
-                <a:ea typeface="Times New Roman" pitchFamily="34" charset="-122"/>
-                <a:cs typeface="Times New Roman" pitchFamily="34" charset="-120"/>
-              </a:rPr>
-              <a:t> / 20</a:t>
-            </a:r>
-            <a:endParaRPr lang="en-US" sz="1600" dirty="0"/>
+            <a:pPr algn="r"/>
+            <a:r>
+              <a:rPr lang="ru-RU" sz="2000" dirty="0">
+                <a:cs typeface="Times New Roman" pitchFamily="34" charset="-120"/>
+              </a:rPr>
+              <a:t>18</a:t>
+            </a:r>
+            <a:endParaRPr lang="en-US" sz="2000" dirty="0">
+              <a:cs typeface="Times New Roman" pitchFamily="34" charset="-120"/>
+            </a:endParaRPr>
           </a:p>
         </p:txBody>
       </p:sp>
@@ -3679,7 +4499,7 @@
 </p:sld>
 </file>
 
-<file path=ppt/slides/slide16.xml><?xml version="1.0" encoding="utf-8"?>
+<file path=ppt/slides/slide19.xml><?xml version="1.0" encoding="utf-8"?>
 <p:sld xmlns:a="http://schemas.openxmlformats.org/drawingml/2006/main" xmlns:r="http://schemas.openxmlformats.org/officeDocument/2006/relationships" xmlns:p="http://schemas.openxmlformats.org/presentationml/2006/main">
   <p:cSld>
     <p:spTree>
@@ -3800,8 +4620,8 @@
         </p:nvSpPr>
         <p:spPr>
           <a:xfrm>
-            <a:off x="8173329" y="108000"/>
-            <a:ext cx="790671" cy="288000"/>
+            <a:off x="8280000" y="4680000"/>
+            <a:ext cx="468000" cy="360000"/>
           </a:xfrm>
           <a:prstGeom prst="rect">
             <a:avLst/>
@@ -3813,24 +4633,16 @@
           <a:bodyPr wrap="square" rtlCol="0" anchor="ctr"/>
           <a:lstStyle/>
           <a:p>
-            <a:pPr marL="0" indent="0" algn="r">
-              <a:buNone/>
-            </a:pPr>
-            <a:r>
-              <a:rPr lang="ru-RU" sz="1600" dirty="0">
-                <a:ea typeface="Times New Roman" pitchFamily="34" charset="-122"/>
-                <a:cs typeface="Times New Roman" pitchFamily="34" charset="-120"/>
-              </a:rPr>
-              <a:t>16</a:t>
-            </a:r>
-            <a:r>
-              <a:rPr lang="en-US" sz="1600" dirty="0">
-                <a:ea typeface="Times New Roman" pitchFamily="34" charset="-122"/>
-                <a:cs typeface="Times New Roman" pitchFamily="34" charset="-120"/>
-              </a:rPr>
-              <a:t> / 20</a:t>
-            </a:r>
-            <a:endParaRPr lang="en-US" sz="1600" dirty="0"/>
+            <a:pPr algn="r"/>
+            <a:r>
+              <a:rPr lang="ru-RU" sz="2000" dirty="0">
+                <a:cs typeface="Times New Roman" pitchFamily="34" charset="-120"/>
+              </a:rPr>
+              <a:t>19</a:t>
+            </a:r>
+            <a:endParaRPr lang="en-US" sz="2000" dirty="0">
+              <a:cs typeface="Times New Roman" pitchFamily="34" charset="-120"/>
+            </a:endParaRPr>
           </a:p>
         </p:txBody>
       </p:sp>
@@ -3847,7 +4659,365 @@
 </p:sld>
 </file>
 
-<file path=ppt/slides/slide17.xml><?xml version="1.0" encoding="utf-8"?>
+<file path=ppt/slides/slide2.xml><?xml version="1.0" encoding="utf-8"?>
+<p:sld xmlns:a="http://schemas.openxmlformats.org/drawingml/2006/main" xmlns:r="http://schemas.openxmlformats.org/officeDocument/2006/relationships" xmlns:p="http://schemas.openxmlformats.org/presentationml/2006/main">
+  <p:cSld name="Slide 2">
+    <p:spTree>
+      <p:nvGrpSpPr>
+        <p:cNvPr id="1" name=""/>
+        <p:cNvGrpSpPr/>
+        <p:nvPr/>
+      </p:nvGrpSpPr>
+      <p:grpSpPr>
+        <a:xfrm>
+          <a:off x="0" y="0"/>
+          <a:ext cx="0" cy="0"/>
+          <a:chOff x="0" y="0"/>
+          <a:chExt cx="0" cy="0"/>
+        </a:xfrm>
+      </p:grpSpPr>
+      <p:sp>
+        <p:nvSpPr>
+          <p:cNvPr id="2" name="Text 0"/>
+          <p:cNvSpPr>
+            <a:spLocks/>
+          </p:cNvSpPr>
+          <p:nvPr/>
+        </p:nvSpPr>
+        <p:spPr>
+          <a:xfrm>
+            <a:off x="360000" y="36000"/>
+            <a:ext cx="8460000" cy="396000"/>
+          </a:xfrm>
+          <a:prstGeom prst="rect">
+            <a:avLst/>
+          </a:prstGeom>
+          <a:noFill/>
+          <a:ln/>
+        </p:spPr>
+        <p:txBody>
+          <a:bodyPr wrap="square" rtlCol="0" anchor="ctr"/>
+          <a:lstStyle/>
+          <a:p>
+            <a:pPr marL="0" indent="0" algn="l">
+              <a:buNone/>
+            </a:pPr>
+            <a:r>
+              <a:rPr lang="en-US" sz="2800" b="1" dirty="0">
+                <a:ea typeface="Times New Roman" pitchFamily="34" charset="-122"/>
+                <a:cs typeface="Times New Roman" pitchFamily="34" charset="-120"/>
+              </a:rPr>
+              <a:t>2. Актуальность и цель работы</a:t>
+            </a:r>
+            <a:endParaRPr lang="en-US" sz="2800" dirty="0"/>
+          </a:p>
+        </p:txBody>
+      </p:sp>
+      <p:sp>
+        <p:nvSpPr>
+          <p:cNvPr id="3" name="Shape 1"/>
+          <p:cNvSpPr/>
+          <p:nvPr/>
+        </p:nvSpPr>
+        <p:spPr>
+          <a:xfrm>
+            <a:off x="432000" y="468000"/>
+            <a:ext cx="8280000" cy="27432"/>
+          </a:xfrm>
+          <a:prstGeom prst="rect">
+            <a:avLst/>
+          </a:prstGeom>
+          <a:solidFill>
+            <a:srgbClr val="000000"/>
+          </a:solidFill>
+          <a:ln w="12700">
+            <a:solidFill>
+              <a:srgbClr val="000000"/>
+            </a:solidFill>
+            <a:prstDash val="solid"/>
+          </a:ln>
+        </p:spPr>
+      </p:sp>
+      <p:sp>
+        <p:nvSpPr>
+          <p:cNvPr id="4" name="Text 2"/>
+          <p:cNvSpPr/>
+          <p:nvPr/>
+        </p:nvSpPr>
+        <p:spPr>
+          <a:xfrm>
+            <a:off x="8280000" y="4680000"/>
+            <a:ext cx="468000" cy="360000"/>
+          </a:xfrm>
+          <a:prstGeom prst="rect">
+            <a:avLst/>
+          </a:prstGeom>
+          <a:noFill/>
+          <a:ln/>
+        </p:spPr>
+        <p:txBody>
+          <a:bodyPr wrap="square" rtlCol="0" anchor="ctr"/>
+          <a:lstStyle/>
+          <a:p>
+            <a:pPr marL="0" indent="0" algn="r">
+              <a:buNone/>
+            </a:pPr>
+            <a:r>
+              <a:rPr lang="ru-RU" sz="2000" dirty="0">
+                <a:ea typeface="Times New Roman" pitchFamily="34" charset="-122"/>
+                <a:cs typeface="Times New Roman" pitchFamily="34" charset="-120"/>
+              </a:rPr>
+              <a:t>2</a:t>
+            </a:r>
+            <a:endParaRPr lang="en-US" sz="2000" dirty="0"/>
+          </a:p>
+        </p:txBody>
+      </p:sp>
+      <p:sp>
+        <p:nvSpPr>
+          <p:cNvPr id="5" name="Text 3"/>
+          <p:cNvSpPr/>
+          <p:nvPr/>
+        </p:nvSpPr>
+        <p:spPr>
+          <a:xfrm>
+            <a:off x="365760" y="570312"/>
+            <a:ext cx="8412480" cy="320040"/>
+          </a:xfrm>
+          <a:prstGeom prst="rect">
+            <a:avLst/>
+          </a:prstGeom>
+          <a:noFill/>
+          <a:ln/>
+        </p:spPr>
+        <p:txBody>
+          <a:bodyPr wrap="square" rtlCol="0" anchor="ctr"/>
+          <a:lstStyle/>
+          <a:p>
+            <a:pPr marL="0" indent="0">
+              <a:buNone/>
+            </a:pPr>
+            <a:r>
+              <a:rPr lang="en-US" sz="2400" b="1" dirty="0">
+                <a:solidFill>
+                  <a:srgbClr val="000000"/>
+                </a:solidFill>
+                <a:ea typeface="Times New Roman" pitchFamily="34" charset="-122"/>
+                <a:cs typeface="Times New Roman" pitchFamily="34" charset="-120"/>
+              </a:rPr>
+              <a:t>Актуальность</a:t>
+            </a:r>
+            <a:endParaRPr lang="en-US" dirty="0"/>
+          </a:p>
+        </p:txBody>
+      </p:sp>
+      <p:sp>
+        <p:nvSpPr>
+          <p:cNvPr id="6" name="Text 4"/>
+          <p:cNvSpPr/>
+          <p:nvPr/>
+        </p:nvSpPr>
+        <p:spPr>
+          <a:xfrm>
+            <a:off x="365760" y="942996"/>
+            <a:ext cx="8412480" cy="2019642"/>
+          </a:xfrm>
+          <a:prstGeom prst="rect">
+            <a:avLst/>
+          </a:prstGeom>
+          <a:noFill/>
+          <a:ln/>
+        </p:spPr>
+        <p:txBody>
+          <a:bodyPr wrap="square" rtlCol="0" anchor="t"/>
+          <a:lstStyle/>
+          <a:p>
+            <a:pPr marL="285750" indent="-285750">
+              <a:spcAft>
+                <a:spcPts val="600"/>
+              </a:spcAft>
+              <a:buFont typeface="Arial" panose="020B0604020202020204" pitchFamily="34" charset="0"/>
+              <a:buChar char="•"/>
+            </a:pPr>
+            <a:r>
+              <a:rPr lang="en-US" sz="2000" dirty="0">
+                <a:solidFill>
+                  <a:srgbClr val="000000"/>
+                </a:solidFill>
+                <a:ea typeface="Times New Roman" pitchFamily="34" charset="-122"/>
+                <a:cs typeface="Times New Roman" pitchFamily="34" charset="-120"/>
+              </a:rPr>
+              <a:t>Процесс выбора научного руководителя и темы ВКР ведётся вручную: бумажные заявления, электронная почта, таблицы</a:t>
+            </a:r>
+            <a:r>
+              <a:rPr lang="ru-RU" sz="2000" dirty="0">
+                <a:solidFill>
+                  <a:srgbClr val="000000"/>
+                </a:solidFill>
+                <a:ea typeface="Times New Roman" pitchFamily="34" charset="-122"/>
+                <a:cs typeface="Times New Roman" pitchFamily="34" charset="-120"/>
+              </a:rPr>
+              <a:t>.</a:t>
+            </a:r>
+            <a:endParaRPr lang="en-US" sz="2000" dirty="0"/>
+          </a:p>
+          <a:p>
+            <a:pPr marL="285750" indent="-285750">
+              <a:spcAft>
+                <a:spcPts val="600"/>
+              </a:spcAft>
+              <a:buFont typeface="Arial" panose="020B0604020202020204" pitchFamily="34" charset="0"/>
+              <a:buChar char="•"/>
+            </a:pPr>
+            <a:r>
+              <a:rPr lang="en-US" sz="2000" dirty="0">
+                <a:solidFill>
+                  <a:srgbClr val="000000"/>
+                </a:solidFill>
+                <a:ea typeface="Times New Roman" pitchFamily="34" charset="-122"/>
+                <a:cs typeface="Times New Roman" pitchFamily="34" charset="-120"/>
+              </a:rPr>
+              <a:t>Отсутствует единый регламентированный цифровой процесс согласования</a:t>
+            </a:r>
+            <a:r>
+              <a:rPr lang="ru-RU" sz="2000" dirty="0">
+                <a:solidFill>
+                  <a:srgbClr val="000000"/>
+                </a:solidFill>
+                <a:ea typeface="Times New Roman" pitchFamily="34" charset="-122"/>
+                <a:cs typeface="Times New Roman" pitchFamily="34" charset="-120"/>
+              </a:rPr>
+              <a:t>.</a:t>
+            </a:r>
+            <a:endParaRPr lang="en-US" sz="2000" dirty="0"/>
+          </a:p>
+          <a:p>
+            <a:pPr marL="285750" indent="-285750">
+              <a:spcAft>
+                <a:spcPts val="600"/>
+              </a:spcAft>
+              <a:buFont typeface="Arial" panose="020B0604020202020204" pitchFamily="34" charset="0"/>
+              <a:buChar char="•"/>
+            </a:pPr>
+            <a:r>
+              <a:rPr lang="en-US" sz="2000" dirty="0">
+                <a:solidFill>
+                  <a:srgbClr val="000000"/>
+                </a:solidFill>
+                <a:ea typeface="Times New Roman" pitchFamily="34" charset="-122"/>
+                <a:cs typeface="Times New Roman" pitchFamily="34" charset="-120"/>
+              </a:rPr>
+              <a:t>Разрозненность данных и невозможность отслеживания статуса заявки в реальном времени</a:t>
+            </a:r>
+            <a:r>
+              <a:rPr lang="ru-RU" sz="2000" dirty="0">
+                <a:solidFill>
+                  <a:srgbClr val="000000"/>
+                </a:solidFill>
+                <a:ea typeface="Times New Roman" pitchFamily="34" charset="-122"/>
+                <a:cs typeface="Times New Roman" pitchFamily="34" charset="-120"/>
+              </a:rPr>
+              <a:t>.</a:t>
+            </a:r>
+            <a:endParaRPr lang="en-US" sz="2000" dirty="0"/>
+          </a:p>
+        </p:txBody>
+      </p:sp>
+      <p:sp>
+        <p:nvSpPr>
+          <p:cNvPr id="7" name="Text 5"/>
+          <p:cNvSpPr/>
+          <p:nvPr/>
+        </p:nvSpPr>
+        <p:spPr>
+          <a:xfrm>
+            <a:off x="360000" y="3241318"/>
+            <a:ext cx="8412480" cy="320040"/>
+          </a:xfrm>
+          <a:prstGeom prst="rect">
+            <a:avLst/>
+          </a:prstGeom>
+          <a:noFill/>
+          <a:ln/>
+        </p:spPr>
+        <p:txBody>
+          <a:bodyPr wrap="square" rtlCol="0" anchor="ctr"/>
+          <a:lstStyle/>
+          <a:p>
+            <a:pPr marL="0" indent="0">
+              <a:buNone/>
+            </a:pPr>
+            <a:r>
+              <a:rPr lang="en-US" sz="2400" b="1" dirty="0">
+                <a:solidFill>
+                  <a:srgbClr val="000000"/>
+                </a:solidFill>
+                <a:ea typeface="Times New Roman" pitchFamily="34" charset="-122"/>
+                <a:cs typeface="Times New Roman" pitchFamily="34" charset="-120"/>
+              </a:rPr>
+              <a:t>Цель работы</a:t>
+            </a:r>
+            <a:endParaRPr lang="en-US" sz="2400" dirty="0"/>
+          </a:p>
+        </p:txBody>
+      </p:sp>
+      <p:sp>
+        <p:nvSpPr>
+          <p:cNvPr id="8" name="Text 6"/>
+          <p:cNvSpPr/>
+          <p:nvPr/>
+        </p:nvSpPr>
+        <p:spPr>
+          <a:xfrm>
+            <a:off x="360000" y="3614764"/>
+            <a:ext cx="8412480" cy="958424"/>
+          </a:xfrm>
+          <a:prstGeom prst="rect">
+            <a:avLst/>
+          </a:prstGeom>
+          <a:noFill/>
+          <a:ln/>
+        </p:spPr>
+        <p:txBody>
+          <a:bodyPr wrap="square" rtlCol="0" anchor="t"/>
+          <a:lstStyle/>
+          <a:p>
+            <a:pPr marL="0" indent="0" algn="just">
+              <a:buNone/>
+            </a:pPr>
+            <a:r>
+              <a:rPr lang="ru-RU" sz="2000" dirty="0">
+                <a:solidFill>
+                  <a:srgbClr val="000000"/>
+                </a:solidFill>
+                <a:ea typeface="Times New Roman" pitchFamily="34" charset="-122"/>
+                <a:cs typeface="Times New Roman" pitchFamily="34" charset="-120"/>
+              </a:rPr>
+              <a:t>Автоматизация </a:t>
+            </a:r>
+            <a:r>
+              <a:rPr lang="en-US" sz="2000" dirty="0">
+                <a:solidFill>
+                  <a:srgbClr val="000000"/>
+                </a:solidFill>
+                <a:ea typeface="Times New Roman" pitchFamily="34" charset="-122"/>
+                <a:cs typeface="Times New Roman" pitchFamily="34" charset="-120"/>
+              </a:rPr>
+              <a:t>процесса организации ВКР за счёт разработки прототипа программно-информационной системы выбора научного руководителя и темы ВКР в высшем учебном заведении.</a:t>
+            </a:r>
+            <a:endParaRPr lang="en-US" sz="2000" dirty="0"/>
+          </a:p>
+        </p:txBody>
+      </p:sp>
+    </p:spTree>
+  </p:cSld>
+  <p:clrMapOvr>
+    <a:masterClrMapping/>
+  </p:clrMapOvr>
+</p:sld>
+</file>
+
+<file path=ppt/slides/slide20.xml><?xml version="1.0" encoding="utf-8"?>
 <p:sld xmlns:a="http://schemas.openxmlformats.org/drawingml/2006/main" xmlns:r="http://schemas.openxmlformats.org/officeDocument/2006/relationships" xmlns:p="http://schemas.openxmlformats.org/presentationml/2006/main">
   <p:cSld>
     <p:spTree>
@@ -3968,8 +5138,8 @@
         </p:nvSpPr>
         <p:spPr>
           <a:xfrm>
-            <a:off x="8173329" y="108000"/>
-            <a:ext cx="790671" cy="288000"/>
+            <a:off x="8280000" y="4680000"/>
+            <a:ext cx="468000" cy="360000"/>
           </a:xfrm>
           <a:prstGeom prst="rect">
             <a:avLst/>
@@ -3981,24 +5151,16 @@
           <a:bodyPr wrap="square" rtlCol="0" anchor="ctr"/>
           <a:lstStyle/>
           <a:p>
-            <a:pPr marL="0" indent="0" algn="r">
-              <a:buNone/>
-            </a:pPr>
-            <a:r>
-              <a:rPr lang="ru-RU" sz="1600" dirty="0">
-                <a:ea typeface="Times New Roman" pitchFamily="34" charset="-122"/>
-                <a:cs typeface="Times New Roman" pitchFamily="34" charset="-120"/>
-              </a:rPr>
-              <a:t>17</a:t>
-            </a:r>
-            <a:r>
-              <a:rPr lang="en-US" sz="1600" dirty="0">
-                <a:ea typeface="Times New Roman" pitchFamily="34" charset="-122"/>
-                <a:cs typeface="Times New Roman" pitchFamily="34" charset="-120"/>
-              </a:rPr>
-              <a:t> / 20</a:t>
-            </a:r>
-            <a:endParaRPr lang="en-US" sz="1600" dirty="0"/>
+            <a:pPr algn="r"/>
+            <a:r>
+              <a:rPr lang="ru-RU" sz="2000" dirty="0">
+                <a:cs typeface="Times New Roman" pitchFamily="34" charset="-120"/>
+              </a:rPr>
+              <a:t>20</a:t>
+            </a:r>
+            <a:endParaRPr lang="en-US" sz="2000" dirty="0">
+              <a:cs typeface="Times New Roman" pitchFamily="34" charset="-120"/>
+            </a:endParaRPr>
           </a:p>
         </p:txBody>
       </p:sp>
@@ -4015,7 +5177,7 @@
 </p:sld>
 </file>
 
-<file path=ppt/slides/slide18.xml><?xml version="1.0" encoding="utf-8"?>
+<file path=ppt/slides/slide21.xml><?xml version="1.0" encoding="utf-8"?>
 <p:sld xmlns:a="http://schemas.openxmlformats.org/drawingml/2006/main" xmlns:r="http://schemas.openxmlformats.org/officeDocument/2006/relationships" xmlns:p="http://schemas.openxmlformats.org/presentationml/2006/main">
   <p:cSld>
     <p:spTree>
@@ -4136,8 +5298,8 @@
         </p:nvSpPr>
         <p:spPr>
           <a:xfrm>
-            <a:off x="8173329" y="108000"/>
-            <a:ext cx="790671" cy="288000"/>
+            <a:off x="8280000" y="4680000"/>
+            <a:ext cx="468000" cy="360000"/>
           </a:xfrm>
           <a:prstGeom prst="rect">
             <a:avLst/>
@@ -4149,24 +5311,16 @@
           <a:bodyPr wrap="square" rtlCol="0" anchor="ctr"/>
           <a:lstStyle/>
           <a:p>
-            <a:pPr marL="0" indent="0" algn="r">
-              <a:buNone/>
-            </a:pPr>
-            <a:r>
-              <a:rPr lang="ru-RU" sz="1600" dirty="0">
-                <a:ea typeface="Times New Roman" pitchFamily="34" charset="-122"/>
-                <a:cs typeface="Times New Roman" pitchFamily="34" charset="-120"/>
-              </a:rPr>
-              <a:t>18</a:t>
-            </a:r>
-            <a:r>
-              <a:rPr lang="en-US" sz="1600" dirty="0">
-                <a:ea typeface="Times New Roman" pitchFamily="34" charset="-122"/>
-                <a:cs typeface="Times New Roman" pitchFamily="34" charset="-120"/>
-              </a:rPr>
-              <a:t> / 20</a:t>
-            </a:r>
-            <a:endParaRPr lang="en-US" sz="1600" dirty="0"/>
+            <a:pPr algn="r"/>
+            <a:r>
+              <a:rPr lang="ru-RU" sz="2000" dirty="0">
+                <a:cs typeface="Times New Roman" pitchFamily="34" charset="-120"/>
+              </a:rPr>
+              <a:t>21</a:t>
+            </a:r>
+            <a:endParaRPr lang="en-US" sz="2000" dirty="0">
+              <a:cs typeface="Times New Roman" pitchFamily="34" charset="-120"/>
+            </a:endParaRPr>
           </a:p>
         </p:txBody>
       </p:sp>
@@ -4183,7 +5337,7 @@
 </p:sld>
 </file>
 
-<file path=ppt/slides/slide19.xml><?xml version="1.0" encoding="utf-8"?>
+<file path=ppt/slides/slide22.xml><?xml version="1.0" encoding="utf-8"?>
 <p:sld xmlns:a="http://schemas.openxmlformats.org/drawingml/2006/main" xmlns:r="http://schemas.openxmlformats.org/officeDocument/2006/relationships" xmlns:p="http://schemas.openxmlformats.org/presentationml/2006/main">
   <p:cSld name="Slide 14">
     <p:spTree>
@@ -4424,8 +5578,8 @@
         </p:nvSpPr>
         <p:spPr>
           <a:xfrm>
-            <a:off x="8173329" y="108000"/>
-            <a:ext cx="790671" cy="288000"/>
+            <a:off x="8280000" y="4680000"/>
+            <a:ext cx="468000" cy="360000"/>
           </a:xfrm>
           <a:prstGeom prst="rect">
             <a:avLst/>
@@ -4437,24 +5591,16 @@
           <a:bodyPr wrap="square" rtlCol="0" anchor="ctr"/>
           <a:lstStyle/>
           <a:p>
-            <a:pPr marL="0" indent="0" algn="r">
-              <a:buNone/>
-            </a:pPr>
-            <a:r>
-              <a:rPr lang="ru-RU" sz="1600" dirty="0">
-                <a:ea typeface="Times New Roman" pitchFamily="34" charset="-122"/>
-                <a:cs typeface="Times New Roman" pitchFamily="34" charset="-120"/>
-              </a:rPr>
-              <a:t>19</a:t>
-            </a:r>
-            <a:r>
-              <a:rPr lang="en-US" sz="1600" dirty="0">
-                <a:ea typeface="Times New Roman" pitchFamily="34" charset="-122"/>
-                <a:cs typeface="Times New Roman" pitchFamily="34" charset="-120"/>
-              </a:rPr>
-              <a:t> / 20</a:t>
-            </a:r>
-            <a:endParaRPr lang="en-US" sz="1600" dirty="0"/>
+            <a:pPr algn="r"/>
+            <a:r>
+              <a:rPr lang="ru-RU" sz="2000" dirty="0">
+                <a:cs typeface="Times New Roman" pitchFamily="34" charset="-120"/>
+              </a:rPr>
+              <a:t>22</a:t>
+            </a:r>
+            <a:endParaRPr lang="en-US" sz="2000" dirty="0">
+              <a:cs typeface="Times New Roman" pitchFamily="34" charset="-120"/>
+            </a:endParaRPr>
           </a:p>
         </p:txBody>
       </p:sp>
@@ -4466,9 +5612,9 @@
 </p:sld>
 </file>
 
-<file path=ppt/slides/slide2.xml><?xml version="1.0" encoding="utf-8"?>
+<file path=ppt/slides/slide23.xml><?xml version="1.0" encoding="utf-8"?>
 <p:sld xmlns:a="http://schemas.openxmlformats.org/drawingml/2006/main" xmlns:r="http://schemas.openxmlformats.org/officeDocument/2006/relationships" xmlns:p="http://schemas.openxmlformats.org/presentationml/2006/main">
-  <p:cSld name="Slide 2">
+  <p:cSld name="Slide 15">
     <p:spTree>
       <p:nvGrpSpPr>
         <p:cNvPr id="1" name=""/>
@@ -4486,9 +5632,7 @@
       <p:sp>
         <p:nvSpPr>
           <p:cNvPr id="2" name="Text 0"/>
-          <p:cNvSpPr>
-            <a:spLocks/>
-          </p:cNvSpPr>
+          <p:cNvSpPr/>
           <p:nvPr/>
         </p:nvSpPr>
         <p:spPr>
@@ -4506,17 +5650,12 @@
           <a:bodyPr wrap="square" rtlCol="0" anchor="ctr"/>
           <a:lstStyle/>
           <a:p>
-            <a:pPr marL="0" indent="0" algn="l">
-              <a:buNone/>
-            </a:pPr>
             <a:r>
               <a:rPr lang="en-US" sz="2800" b="1" dirty="0">
-                <a:ea typeface="Times New Roman" pitchFamily="34" charset="-122"/>
-                <a:cs typeface="Times New Roman" pitchFamily="34" charset="-120"/>
-              </a:rPr>
-              <a:t>2. Актуальность и цель работы</a:t>
-            </a:r>
-            <a:endParaRPr lang="en-US" sz="2800" dirty="0"/>
+                <a:cs typeface="Times New Roman" pitchFamily="34" charset="-120"/>
+              </a:rPr>
+              <a:t>15. Заключение</a:t>
+            </a:r>
           </a:p>
         </p:txBody>
       </p:sp>
@@ -4547,347 +5686,6 @@
       </p:sp>
       <p:sp>
         <p:nvSpPr>
-          <p:cNvPr id="4" name="Text 2"/>
-          <p:cNvSpPr/>
-          <p:nvPr/>
-        </p:nvSpPr>
-        <p:spPr>
-          <a:xfrm>
-            <a:off x="8173329" y="108000"/>
-            <a:ext cx="790671" cy="288000"/>
-          </a:xfrm>
-          <a:prstGeom prst="rect">
-            <a:avLst/>
-          </a:prstGeom>
-          <a:noFill/>
-          <a:ln/>
-        </p:spPr>
-        <p:txBody>
-          <a:bodyPr wrap="square" rtlCol="0" anchor="ctr"/>
-          <a:lstStyle/>
-          <a:p>
-            <a:pPr marL="0" indent="0" algn="r">
-              <a:buNone/>
-            </a:pPr>
-            <a:r>
-              <a:rPr lang="en-US" sz="1600" dirty="0">
-                <a:ea typeface="Times New Roman" pitchFamily="34" charset="-122"/>
-                <a:cs typeface="Times New Roman" pitchFamily="34" charset="-120"/>
-              </a:rPr>
-              <a:t>2 / 20</a:t>
-            </a:r>
-            <a:endParaRPr lang="en-US" sz="1600" dirty="0"/>
-          </a:p>
-        </p:txBody>
-      </p:sp>
-      <p:sp>
-        <p:nvSpPr>
-          <p:cNvPr id="5" name="Text 3"/>
-          <p:cNvSpPr/>
-          <p:nvPr/>
-        </p:nvSpPr>
-        <p:spPr>
-          <a:xfrm>
-            <a:off x="365760" y="570312"/>
-            <a:ext cx="8412480" cy="320040"/>
-          </a:xfrm>
-          <a:prstGeom prst="rect">
-            <a:avLst/>
-          </a:prstGeom>
-          <a:noFill/>
-          <a:ln/>
-        </p:spPr>
-        <p:txBody>
-          <a:bodyPr wrap="square" rtlCol="0" anchor="ctr"/>
-          <a:lstStyle/>
-          <a:p>
-            <a:pPr marL="0" indent="0">
-              <a:buNone/>
-            </a:pPr>
-            <a:r>
-              <a:rPr lang="en-US" sz="2400" b="1" dirty="0">
-                <a:solidFill>
-                  <a:srgbClr val="000000"/>
-                </a:solidFill>
-                <a:ea typeface="Times New Roman" pitchFamily="34" charset="-122"/>
-                <a:cs typeface="Times New Roman" pitchFamily="34" charset="-120"/>
-              </a:rPr>
-              <a:t>Актуальность</a:t>
-            </a:r>
-            <a:endParaRPr lang="en-US" dirty="0"/>
-          </a:p>
-        </p:txBody>
-      </p:sp>
-      <p:sp>
-        <p:nvSpPr>
-          <p:cNvPr id="6" name="Text 4"/>
-          <p:cNvSpPr/>
-          <p:nvPr/>
-        </p:nvSpPr>
-        <p:spPr>
-          <a:xfrm>
-            <a:off x="365760" y="942996"/>
-            <a:ext cx="8412480" cy="2019642"/>
-          </a:xfrm>
-          <a:prstGeom prst="rect">
-            <a:avLst/>
-          </a:prstGeom>
-          <a:noFill/>
-          <a:ln/>
-        </p:spPr>
-        <p:txBody>
-          <a:bodyPr wrap="square" rtlCol="0" anchor="t"/>
-          <a:lstStyle/>
-          <a:p>
-            <a:pPr marL="285750" indent="-285750">
-              <a:spcAft>
-                <a:spcPts val="600"/>
-              </a:spcAft>
-              <a:buFont typeface="Arial" panose="020B0604020202020204" pitchFamily="34" charset="0"/>
-              <a:buChar char="•"/>
-            </a:pPr>
-            <a:r>
-              <a:rPr lang="en-US" sz="2000" dirty="0">
-                <a:solidFill>
-                  <a:srgbClr val="000000"/>
-                </a:solidFill>
-                <a:ea typeface="Times New Roman" pitchFamily="34" charset="-122"/>
-                <a:cs typeface="Times New Roman" pitchFamily="34" charset="-120"/>
-              </a:rPr>
-              <a:t>Процесс выбора научного руководителя и темы ВКР ведётся вручную: бумажные заявления, электронная почта, таблицы</a:t>
-            </a:r>
-            <a:r>
-              <a:rPr lang="ru-RU" sz="2000" dirty="0">
-                <a:solidFill>
-                  <a:srgbClr val="000000"/>
-                </a:solidFill>
-                <a:ea typeface="Times New Roman" pitchFamily="34" charset="-122"/>
-                <a:cs typeface="Times New Roman" pitchFamily="34" charset="-120"/>
-              </a:rPr>
-              <a:t>.</a:t>
-            </a:r>
-            <a:endParaRPr lang="en-US" sz="2000" dirty="0"/>
-          </a:p>
-          <a:p>
-            <a:pPr marL="285750" indent="-285750">
-              <a:spcAft>
-                <a:spcPts val="600"/>
-              </a:spcAft>
-              <a:buFont typeface="Arial" panose="020B0604020202020204" pitchFamily="34" charset="0"/>
-              <a:buChar char="•"/>
-            </a:pPr>
-            <a:r>
-              <a:rPr lang="en-US" sz="2000" dirty="0">
-                <a:solidFill>
-                  <a:srgbClr val="000000"/>
-                </a:solidFill>
-                <a:ea typeface="Times New Roman" pitchFamily="34" charset="-122"/>
-                <a:cs typeface="Times New Roman" pitchFamily="34" charset="-120"/>
-              </a:rPr>
-              <a:t>Отсутствует единый регламентированный цифровой процесс согласования</a:t>
-            </a:r>
-            <a:r>
-              <a:rPr lang="ru-RU" sz="2000" dirty="0">
-                <a:solidFill>
-                  <a:srgbClr val="000000"/>
-                </a:solidFill>
-                <a:ea typeface="Times New Roman" pitchFamily="34" charset="-122"/>
-                <a:cs typeface="Times New Roman" pitchFamily="34" charset="-120"/>
-              </a:rPr>
-              <a:t>.</a:t>
-            </a:r>
-            <a:endParaRPr lang="en-US" sz="2000" dirty="0"/>
-          </a:p>
-          <a:p>
-            <a:pPr marL="285750" indent="-285750">
-              <a:spcAft>
-                <a:spcPts val="600"/>
-              </a:spcAft>
-              <a:buFont typeface="Arial" panose="020B0604020202020204" pitchFamily="34" charset="0"/>
-              <a:buChar char="•"/>
-            </a:pPr>
-            <a:r>
-              <a:rPr lang="en-US" sz="2000" dirty="0">
-                <a:solidFill>
-                  <a:srgbClr val="000000"/>
-                </a:solidFill>
-                <a:ea typeface="Times New Roman" pitchFamily="34" charset="-122"/>
-                <a:cs typeface="Times New Roman" pitchFamily="34" charset="-120"/>
-              </a:rPr>
-              <a:t>Разрозненность данных и невозможность отслеживания статуса заявки в реальном времени</a:t>
-            </a:r>
-            <a:r>
-              <a:rPr lang="ru-RU" sz="2000" dirty="0">
-                <a:solidFill>
-                  <a:srgbClr val="000000"/>
-                </a:solidFill>
-                <a:ea typeface="Times New Roman" pitchFamily="34" charset="-122"/>
-                <a:cs typeface="Times New Roman" pitchFamily="34" charset="-120"/>
-              </a:rPr>
-              <a:t>.</a:t>
-            </a:r>
-            <a:endParaRPr lang="en-US" sz="2000" dirty="0"/>
-          </a:p>
-        </p:txBody>
-      </p:sp>
-      <p:sp>
-        <p:nvSpPr>
-          <p:cNvPr id="7" name="Text 5"/>
-          <p:cNvSpPr/>
-          <p:nvPr/>
-        </p:nvSpPr>
-        <p:spPr>
-          <a:xfrm>
-            <a:off x="365760" y="3015283"/>
-            <a:ext cx="8412480" cy="320040"/>
-          </a:xfrm>
-          <a:prstGeom prst="rect">
-            <a:avLst/>
-          </a:prstGeom>
-          <a:noFill/>
-          <a:ln/>
-        </p:spPr>
-        <p:txBody>
-          <a:bodyPr wrap="square" rtlCol="0" anchor="ctr"/>
-          <a:lstStyle/>
-          <a:p>
-            <a:pPr marL="0" indent="0">
-              <a:buNone/>
-            </a:pPr>
-            <a:r>
-              <a:rPr lang="en-US" sz="2400" b="1" dirty="0">
-                <a:solidFill>
-                  <a:srgbClr val="000000"/>
-                </a:solidFill>
-                <a:ea typeface="Times New Roman" pitchFamily="34" charset="-122"/>
-                <a:cs typeface="Times New Roman" pitchFamily="34" charset="-120"/>
-              </a:rPr>
-              <a:t>Цель работы</a:t>
-            </a:r>
-            <a:endParaRPr lang="en-US" sz="2400" dirty="0"/>
-          </a:p>
-        </p:txBody>
-      </p:sp>
-      <p:sp>
-        <p:nvSpPr>
-          <p:cNvPr id="8" name="Text 6"/>
-          <p:cNvSpPr/>
-          <p:nvPr/>
-        </p:nvSpPr>
-        <p:spPr>
-          <a:xfrm>
-            <a:off x="365760" y="3404036"/>
-            <a:ext cx="8412480" cy="958424"/>
-          </a:xfrm>
-          <a:prstGeom prst="rect">
-            <a:avLst/>
-          </a:prstGeom>
-          <a:noFill/>
-          <a:ln/>
-        </p:spPr>
-        <p:txBody>
-          <a:bodyPr wrap="square" rtlCol="0" anchor="t"/>
-          <a:lstStyle/>
-          <a:p>
-            <a:pPr marL="0" indent="0" algn="just">
-              <a:buNone/>
-            </a:pPr>
-            <a:r>
-              <a:rPr lang="en-US" sz="2000" dirty="0">
-                <a:solidFill>
-                  <a:srgbClr val="000000"/>
-                </a:solidFill>
-                <a:ea typeface="Times New Roman" pitchFamily="34" charset="-122"/>
-                <a:cs typeface="Times New Roman" pitchFamily="34" charset="-120"/>
-              </a:rPr>
-              <a:t>Повышение эффективности процесса организации ВКР за счёт разработки прототипа автоматизированной программно-информационной системы выбора научного руководителя и темы ВКР в высшем учебном заведении.</a:t>
-            </a:r>
-            <a:endParaRPr lang="en-US" sz="2000" dirty="0"/>
-          </a:p>
-        </p:txBody>
-      </p:sp>
-    </p:spTree>
-  </p:cSld>
-  <p:clrMapOvr>
-    <a:masterClrMapping/>
-  </p:clrMapOvr>
-</p:sld>
-</file>
-
-<file path=ppt/slides/slide20.xml><?xml version="1.0" encoding="utf-8"?>
-<p:sld xmlns:a="http://schemas.openxmlformats.org/drawingml/2006/main" xmlns:r="http://schemas.openxmlformats.org/officeDocument/2006/relationships" xmlns:p="http://schemas.openxmlformats.org/presentationml/2006/main">
-  <p:cSld name="Slide 15">
-    <p:spTree>
-      <p:nvGrpSpPr>
-        <p:cNvPr id="1" name=""/>
-        <p:cNvGrpSpPr/>
-        <p:nvPr/>
-      </p:nvGrpSpPr>
-      <p:grpSpPr>
-        <a:xfrm>
-          <a:off x="0" y="0"/>
-          <a:ext cx="0" cy="0"/>
-          <a:chOff x="0" y="0"/>
-          <a:chExt cx="0" cy="0"/>
-        </a:xfrm>
-      </p:grpSpPr>
-      <p:sp>
-        <p:nvSpPr>
-          <p:cNvPr id="2" name="Text 0"/>
-          <p:cNvSpPr/>
-          <p:nvPr/>
-        </p:nvSpPr>
-        <p:spPr>
-          <a:xfrm>
-            <a:off x="360000" y="36000"/>
-            <a:ext cx="8460000" cy="396000"/>
-          </a:xfrm>
-          <a:prstGeom prst="rect">
-            <a:avLst/>
-          </a:prstGeom>
-          <a:noFill/>
-          <a:ln/>
-        </p:spPr>
-        <p:txBody>
-          <a:bodyPr wrap="square" rtlCol="0" anchor="ctr"/>
-          <a:lstStyle/>
-          <a:p>
-            <a:r>
-              <a:rPr lang="en-US" sz="2800" b="1" dirty="0">
-                <a:cs typeface="Times New Roman" pitchFamily="34" charset="-120"/>
-              </a:rPr>
-              <a:t>15. Заключение</a:t>
-            </a:r>
-          </a:p>
-        </p:txBody>
-      </p:sp>
-      <p:sp>
-        <p:nvSpPr>
-          <p:cNvPr id="3" name="Shape 1"/>
-          <p:cNvSpPr/>
-          <p:nvPr/>
-        </p:nvSpPr>
-        <p:spPr>
-          <a:xfrm>
-            <a:off x="432000" y="468000"/>
-            <a:ext cx="8280000" cy="27432"/>
-          </a:xfrm>
-          <a:prstGeom prst="rect">
-            <a:avLst/>
-          </a:prstGeom>
-          <a:solidFill>
-            <a:srgbClr val="000000"/>
-          </a:solidFill>
-          <a:ln w="12700">
-            <a:solidFill>
-              <a:srgbClr val="000000"/>
-            </a:solidFill>
-            <a:prstDash val="solid"/>
-          </a:ln>
-        </p:spPr>
-      </p:sp>
-      <p:sp>
-        <p:nvSpPr>
           <p:cNvPr id="5" name="Text 3"/>
           <p:cNvSpPr/>
           <p:nvPr/>
@@ -4935,8 +5733,8 @@
         </p:nvSpPr>
         <p:spPr>
           <a:xfrm>
-            <a:off x="365760" y="932040"/>
-            <a:ext cx="8412480" cy="2634120"/>
+            <a:off x="365760" y="932039"/>
+            <a:ext cx="8412480" cy="2830815"/>
           </a:xfrm>
           <a:prstGeom prst="rect">
             <a:avLst/>
@@ -4948,164 +5746,77 @@
           <a:bodyPr wrap="square" rtlCol="0" anchor="t"/>
           <a:lstStyle/>
           <a:p>
-            <a:pPr marL="179388" indent="-179388">
-              <a:spcAft>
-                <a:spcPts val="600"/>
-              </a:spcAft>
+            <a:pPr marL="285750" indent="-285750">
               <a:buFont typeface="Arial" panose="020B0604020202020204" pitchFamily="34" charset="0"/>
               <a:buChar char="•"/>
             </a:pPr>
             <a:r>
-              <a:rPr lang="en-US" dirty="0">
-                <a:solidFill>
-                  <a:srgbClr val="000000"/>
-                </a:solidFill>
-                <a:latin typeface="Calibri (Основной текст)"/>
-                <a:ea typeface="Times New Roman" pitchFamily="34" charset="-122"/>
-                <a:cs typeface="Times New Roman" pitchFamily="34" charset="-120"/>
-              </a:rPr>
-              <a:t>Разработан прототип системы AcademicTopicSelectionService, автоматизирующей выбор научного руководителя и темы ВКР.</a:t>
-            </a:r>
-            <a:endParaRPr lang="en-US" dirty="0">
-              <a:latin typeface="Calibri (Основной текст)"/>
-            </a:endParaRPr>
-          </a:p>
-          <a:p>
-            <a:pPr marL="179388" indent="-179388">
-              <a:spcAft>
-                <a:spcPts val="600"/>
-              </a:spcAft>
+              <a:rPr lang="ru-RU" dirty="0"/>
+              <a:t>Проведён анализ предметной области и существующих систем управления учебным процессом.</a:t>
+            </a:r>
+          </a:p>
+          <a:p>
+            <a:pPr marL="285750" indent="-285750">
               <a:buFont typeface="Arial" panose="020B0604020202020204" pitchFamily="34" charset="0"/>
               <a:buChar char="•"/>
             </a:pPr>
             <a:r>
-              <a:rPr lang="en-US" dirty="0">
-                <a:solidFill>
-                  <a:srgbClr val="000000"/>
-                </a:solidFill>
-                <a:latin typeface="Calibri (Основной текст)"/>
-                <a:ea typeface="Times New Roman" pitchFamily="34" charset="-122"/>
-                <a:cs typeface="Times New Roman" pitchFamily="34" charset="-120"/>
-              </a:rPr>
-              <a:t>Реализован двухэтапный процесс согласования с журналом статусов.</a:t>
-            </a:r>
-            <a:endParaRPr lang="en-US" dirty="0">
-              <a:latin typeface="Calibri (Основной текст)"/>
-            </a:endParaRPr>
-          </a:p>
-          <a:p>
-            <a:pPr marL="179388" indent="-179388">
-              <a:spcAft>
-                <a:spcPts val="600"/>
-              </a:spcAft>
+              <a:rPr lang="ru-RU" dirty="0"/>
+              <a:t>Сформулированы функциональные и нефункциональные требования к системе.</a:t>
+            </a:r>
+          </a:p>
+          <a:p>
+            <a:pPr marL="285750" indent="-285750">
               <a:buFont typeface="Arial" panose="020B0604020202020204" pitchFamily="34" charset="0"/>
               <a:buChar char="•"/>
             </a:pPr>
             <a:r>
-              <a:rPr lang="en-US" dirty="0">
-                <a:solidFill>
-                  <a:srgbClr val="000000"/>
-                </a:solidFill>
-                <a:latin typeface="Calibri (Основной текст)"/>
-                <a:ea typeface="Times New Roman" pitchFamily="34" charset="-122"/>
-                <a:cs typeface="Times New Roman" pitchFamily="34" charset="-120"/>
-              </a:rPr>
-              <a:t>Обеспечена ролевая модель доступа для 4 типов пользователей.</a:t>
-            </a:r>
-            <a:endParaRPr lang="en-US" dirty="0">
-              <a:latin typeface="Calibri (Основной текст)"/>
-            </a:endParaRPr>
-          </a:p>
-          <a:p>
-            <a:pPr marL="179388" indent="-179388">
-              <a:spcAft>
-                <a:spcPts val="600"/>
-              </a:spcAft>
+              <a:rPr lang="ru-RU" dirty="0"/>
+              <a:t>Спроектирована архитектура системы</a:t>
+            </a:r>
+            <a:r>
+              <a:rPr lang="en-US" dirty="0"/>
+              <a:t>.</a:t>
+            </a:r>
+            <a:endParaRPr lang="ru-RU" dirty="0"/>
+          </a:p>
+          <a:p>
+            <a:pPr marL="285750" indent="-285750">
               <a:buFont typeface="Arial" panose="020B0604020202020204" pitchFamily="34" charset="0"/>
               <a:buChar char="•"/>
             </a:pPr>
             <a:r>
-              <a:rPr lang="en-US" dirty="0">
-                <a:solidFill>
-                  <a:srgbClr val="000000"/>
-                </a:solidFill>
-                <a:latin typeface="Calibri (Основной текст)"/>
-                <a:ea typeface="Times New Roman" pitchFamily="34" charset="-122"/>
-                <a:cs typeface="Times New Roman" pitchFamily="34" charset="-120"/>
-              </a:rPr>
-              <a:t>Реализован чат в рамках заявки, подсистема уведомлений и архив защищённых работ.</a:t>
-            </a:r>
-            <a:endParaRPr lang="en-US" dirty="0">
-              <a:latin typeface="Calibri (Основной текст)"/>
-            </a:endParaRPr>
-          </a:p>
-          <a:p>
-            <a:pPr marL="179388" indent="-179388">
-              <a:spcAft>
-                <a:spcPts val="600"/>
-              </a:spcAft>
+              <a:rPr lang="ru-RU" dirty="0"/>
+              <a:t>Реализован двухэтапный алгоритм согласования заявок с управлением жизненными циклами.</a:t>
+            </a:r>
+          </a:p>
+          <a:p>
+            <a:pPr marL="285750" indent="-285750">
               <a:buFont typeface="Arial" panose="020B0604020202020204" pitchFamily="34" charset="0"/>
               <a:buChar char="•"/>
             </a:pPr>
             <a:r>
-              <a:rPr lang="en-US" dirty="0">
-                <a:solidFill>
-                  <a:srgbClr val="000000"/>
-                </a:solidFill>
-                <a:latin typeface="Calibri (Основной текст)"/>
-                <a:ea typeface="Times New Roman" pitchFamily="34" charset="-122"/>
-                <a:cs typeface="Times New Roman" pitchFamily="34" charset="-120"/>
-              </a:rPr>
-              <a:t>Система развёртывается как набор Docker-</a:t>
-            </a:r>
-            <a:r>
-              <a:rPr lang="en-US" dirty="0" err="1">
-                <a:solidFill>
-                  <a:srgbClr val="000000"/>
-                </a:solidFill>
-                <a:latin typeface="Calibri (Основной текст)"/>
-                <a:ea typeface="Times New Roman" pitchFamily="34" charset="-122"/>
-                <a:cs typeface="Times New Roman" pitchFamily="34" charset="-120"/>
-              </a:rPr>
-              <a:t>контейнеров</a:t>
-            </a:r>
-            <a:r>
-              <a:rPr lang="en-US" dirty="0">
-                <a:solidFill>
-                  <a:srgbClr val="000000"/>
-                </a:solidFill>
-                <a:latin typeface="Calibri (Основной текст)"/>
-                <a:ea typeface="Times New Roman" pitchFamily="34" charset="-122"/>
-                <a:cs typeface="Times New Roman" pitchFamily="34" charset="-120"/>
-              </a:rPr>
-              <a:t>.</a:t>
-            </a:r>
-            <a:endParaRPr lang="en-US" dirty="0">
-              <a:latin typeface="Calibri (Основной текст)"/>
-            </a:endParaRPr>
-          </a:p>
-          <a:p>
-            <a:pPr marL="179388" indent="-179388">
-              <a:spcAft>
-                <a:spcPts val="600"/>
-              </a:spcAft>
+              <a:rPr lang="ru-RU" dirty="0"/>
+              <a:t>Разработаны модуль коммуникации, ролевая модель для четырёх типов пользователей и подсистема уведомлений.</a:t>
+            </a:r>
+          </a:p>
+          <a:p>
+            <a:pPr marL="285750" indent="-285750">
               <a:buFont typeface="Arial" panose="020B0604020202020204" pitchFamily="34" charset="0"/>
               <a:buChar char="•"/>
             </a:pPr>
             <a:r>
-              <a:rPr lang="en-US" dirty="0">
-                <a:solidFill>
-                  <a:srgbClr val="000000"/>
-                </a:solidFill>
-                <a:latin typeface="Calibri (Основной текст)"/>
-                <a:ea typeface="Times New Roman" pitchFamily="34" charset="-122"/>
-                <a:cs typeface="Times New Roman" pitchFamily="34" charset="-120"/>
-              </a:rPr>
-              <a:t>Бизнес-логика покрыта автоматизированными тестами.</a:t>
-            </a:r>
-            <a:endParaRPr lang="en-US" dirty="0">
-              <a:latin typeface="Calibri (Основной текст)"/>
-            </a:endParaRPr>
+              <a:rPr lang="ru-RU" dirty="0"/>
+              <a:t>Выполнено тестирование бизнес-логики</a:t>
+            </a:r>
+            <a:r>
+              <a:rPr lang="en-US" dirty="0"/>
+              <a:t> </a:t>
+            </a:r>
+            <a:r>
+              <a:rPr lang="ru-RU" dirty="0"/>
+              <a:t>и разграничения прав доступа.</a:t>
+            </a:r>
           </a:p>
         </p:txBody>
       </p:sp>
@@ -5132,14 +5843,26 @@
           <a:p>
             <a:pPr algn="just"/>
             <a:r>
-              <a:rPr lang="en-US" sz="2000" b="1" dirty="0">
+              <a:rPr lang="ru-RU" sz="2000" b="1" dirty="0">
                 <a:solidFill>
                   <a:srgbClr val="000000"/>
                 </a:solidFill>
                 <a:latin typeface="Calibri (Основной текст)"/>
-                <a:cs typeface="Times New Roman" pitchFamily="34" charset="-120"/>
-              </a:rPr>
-              <a:t>Научная новизна </a:t>
+                <a:ea typeface="Times New Roman" pitchFamily="34" charset="-122"/>
+                <a:cs typeface="Times New Roman" pitchFamily="34" charset="-120"/>
+              </a:rPr>
+              <a:t>Цель достигнута </a:t>
+            </a:r>
+            <a:r>
+              <a:rPr lang="ru-RU" sz="2000" dirty="0">
+                <a:solidFill>
+                  <a:srgbClr val="000000"/>
+                </a:solidFill>
+                <a:latin typeface="Calibri (Основной текст)"/>
+                <a:ea typeface="Times New Roman" pitchFamily="34" charset="-122"/>
+                <a:cs typeface="Times New Roman" pitchFamily="34" charset="-120"/>
+              </a:rPr>
+              <a:t>– разработано </a:t>
             </a:r>
             <a:r>
               <a:rPr lang="en-US" sz="2000" dirty="0">
@@ -5150,7 +5873,7 @@
                 <a:ea typeface="Times New Roman" pitchFamily="34" charset="-122"/>
                 <a:cs typeface="Times New Roman" pitchFamily="34" charset="-120"/>
               </a:rPr>
-              <a:t>— специализированное решение, объединяющее каталог тем и преподавателей, регламентированный ЖЦ заявки, чат и архив ВКР в одном веб-сервисе</a:t>
+              <a:t>специализированное решение, объединяющее каталог тем и преподавателей, регламентированный ЖЦ заявки, чат и архив ВКР в одном веб-сервисе</a:t>
             </a:r>
             <a:endParaRPr lang="en-US" sz="2000" dirty="0">
               <a:latin typeface="Calibri (Основной текст)"/>
@@ -5172,8 +5895,8 @@
         </p:nvSpPr>
         <p:spPr>
           <a:xfrm>
-            <a:off x="8173329" y="108000"/>
-            <a:ext cx="790671" cy="288000"/>
+            <a:off x="8280000" y="4680000"/>
+            <a:ext cx="468000" cy="360000"/>
           </a:xfrm>
           <a:prstGeom prst="rect">
             <a:avLst/>
@@ -5185,31 +5908,16 @@
           <a:bodyPr wrap="square" rtlCol="0" anchor="ctr"/>
           <a:lstStyle/>
           <a:p>
-            <a:pPr marL="0" indent="0" algn="r">
-              <a:buNone/>
-            </a:pPr>
-            <a:r>
-              <a:rPr lang="en-US" sz="1600" dirty="0">
-                <a:ea typeface="Times New Roman" pitchFamily="34" charset="-122"/>
-                <a:cs typeface="Times New Roman" pitchFamily="34" charset="-120"/>
-              </a:rPr>
-              <a:t>2</a:t>
-            </a:r>
-            <a:r>
-              <a:rPr lang="ru-RU" sz="1600" dirty="0">
-                <a:ea typeface="Times New Roman" pitchFamily="34" charset="-122"/>
-                <a:cs typeface="Times New Roman" pitchFamily="34" charset="-120"/>
-              </a:rPr>
-              <a:t>0</a:t>
-            </a:r>
-            <a:r>
-              <a:rPr lang="en-US" sz="1600" dirty="0">
-                <a:ea typeface="Times New Roman" pitchFamily="34" charset="-122"/>
-                <a:cs typeface="Times New Roman" pitchFamily="34" charset="-120"/>
-              </a:rPr>
-              <a:t> / 20</a:t>
-            </a:r>
-            <a:endParaRPr lang="en-US" sz="1600" dirty="0"/>
+            <a:pPr algn="r"/>
+            <a:r>
+              <a:rPr lang="ru-RU" sz="2000" dirty="0">
+                <a:cs typeface="Times New Roman" pitchFamily="34" charset="-120"/>
+              </a:rPr>
+              <a:t>23</a:t>
+            </a:r>
+            <a:endParaRPr lang="en-US" sz="2000" dirty="0">
+              <a:cs typeface="Times New Roman" pitchFamily="34" charset="-120"/>
+            </a:endParaRPr>
           </a:p>
         </p:txBody>
       </p:sp>
@@ -5314,354 +6022,64 @@
           <a:bodyPr wrap="square" rtlCol="0" anchor="t"/>
           <a:lstStyle/>
           <a:p>
-            <a:pPr marL="285750" indent="-285750">
-              <a:spcAft>
-                <a:spcPts val="600"/>
-              </a:spcAft>
+            <a:pPr marL="285750" lvl="0" indent="-285750">
               <a:buFont typeface="Arial" panose="020B0604020202020204" pitchFamily="34" charset="0"/>
               <a:buChar char="•"/>
             </a:pPr>
             <a:r>
-              <a:rPr lang="en-US" dirty="0">
-                <a:solidFill>
-                  <a:srgbClr val="000000"/>
-                </a:solidFill>
-                <a:ea typeface="Times New Roman" pitchFamily="34" charset="-122"/>
-                <a:cs typeface="Times New Roman" pitchFamily="34" charset="-120"/>
-              </a:rPr>
-              <a:t>Анализ предметной области и формирование требований к автоматизации</a:t>
-            </a:r>
-            <a:r>
-              <a:rPr lang="ru-RU" dirty="0">
-                <a:solidFill>
-                  <a:srgbClr val="000000"/>
-                </a:solidFill>
-                <a:ea typeface="Times New Roman" pitchFamily="34" charset="-122"/>
-                <a:cs typeface="Times New Roman" pitchFamily="34" charset="-120"/>
-              </a:rPr>
-              <a:t>.</a:t>
-            </a:r>
-            <a:endParaRPr lang="en-US" dirty="0"/>
-          </a:p>
-          <a:p>
-            <a:pPr marL="285750" indent="-285750">
-              <a:spcAft>
-                <a:spcPts val="600"/>
-              </a:spcAft>
+              <a:rPr lang="ru-RU" sz="2000" dirty="0"/>
+              <a:t>Провести анализ предметной области, исследовать существующие процессы и автоматизированные системы управления учебным процессом.</a:t>
+            </a:r>
+          </a:p>
+          <a:p>
+            <a:pPr marL="285750" lvl="0" indent="-285750">
               <a:buFont typeface="Arial" panose="020B0604020202020204" pitchFamily="34" charset="0"/>
               <a:buChar char="•"/>
             </a:pPr>
             <a:r>
-              <a:rPr lang="en-US" dirty="0">
-                <a:solidFill>
-                  <a:srgbClr val="000000"/>
-                </a:solidFill>
-                <a:ea typeface="Times New Roman" pitchFamily="34" charset="-122"/>
-                <a:cs typeface="Times New Roman" pitchFamily="34" charset="-120"/>
-              </a:rPr>
-              <a:t>Сравнительный анализ существующих систем управления учебным процессом</a:t>
-            </a:r>
-            <a:r>
-              <a:rPr lang="ru-RU" dirty="0">
-                <a:solidFill>
-                  <a:srgbClr val="000000"/>
-                </a:solidFill>
-                <a:ea typeface="Times New Roman" pitchFamily="34" charset="-122"/>
-                <a:cs typeface="Times New Roman" pitchFamily="34" charset="-120"/>
-              </a:rPr>
-              <a:t>.</a:t>
-            </a:r>
-            <a:endParaRPr lang="en-US" dirty="0"/>
-          </a:p>
-          <a:p>
-            <a:pPr marL="285750" indent="-285750">
-              <a:spcAft>
-                <a:spcPts val="600"/>
-              </a:spcAft>
+              <a:rPr lang="ru-RU" sz="2000" dirty="0"/>
+              <a:t>Сформулировать функциональные и нефункциональные требования к разрабатываемой системе.</a:t>
+            </a:r>
+          </a:p>
+          <a:p>
+            <a:pPr marL="285750" lvl="0" indent="-285750">
               <a:buFont typeface="Arial" panose="020B0604020202020204" pitchFamily="34" charset="0"/>
               <a:buChar char="•"/>
             </a:pPr>
             <a:r>
-              <a:rPr lang="en-US" dirty="0">
-                <a:solidFill>
-                  <a:srgbClr val="000000"/>
-                </a:solidFill>
-                <a:ea typeface="Times New Roman" pitchFamily="34" charset="-122"/>
-                <a:cs typeface="Times New Roman" pitchFamily="34" charset="-120"/>
-              </a:rPr>
-              <a:t>Формулировка функциональных и нефункциональных требований</a:t>
-            </a:r>
-            <a:r>
-              <a:rPr lang="ru-RU" dirty="0">
-                <a:solidFill>
-                  <a:srgbClr val="000000"/>
-                </a:solidFill>
-                <a:ea typeface="Times New Roman" pitchFamily="34" charset="-122"/>
-                <a:cs typeface="Times New Roman" pitchFamily="34" charset="-120"/>
-              </a:rPr>
-              <a:t>.</a:t>
-            </a:r>
-            <a:endParaRPr lang="en-US" dirty="0"/>
-          </a:p>
-          <a:p>
-            <a:pPr marL="285750" indent="-285750">
-              <a:spcAft>
-                <a:spcPts val="600"/>
-              </a:spcAft>
+              <a:rPr lang="ru-RU" sz="2000" dirty="0"/>
+              <a:t>Спроектировать архитектуру системы.</a:t>
+            </a:r>
+          </a:p>
+          <a:p>
+            <a:pPr marL="285750" lvl="0" indent="-285750">
               <a:buFont typeface="Arial" panose="020B0604020202020204" pitchFamily="34" charset="0"/>
               <a:buChar char="•"/>
             </a:pPr>
             <a:r>
-              <a:rPr lang="en-US" dirty="0">
-                <a:solidFill>
-                  <a:srgbClr val="000000"/>
-                </a:solidFill>
-                <a:ea typeface="Times New Roman" pitchFamily="34" charset="-122"/>
-                <a:cs typeface="Times New Roman" pitchFamily="34" charset="-120"/>
-              </a:rPr>
-              <a:t>Выбор и обоснование технологического стека</a:t>
-            </a:r>
-            <a:r>
-              <a:rPr lang="ru-RU" dirty="0">
-                <a:solidFill>
-                  <a:srgbClr val="000000"/>
-                </a:solidFill>
-                <a:ea typeface="Times New Roman" pitchFamily="34" charset="-122"/>
-                <a:cs typeface="Times New Roman" pitchFamily="34" charset="-120"/>
-              </a:rPr>
-              <a:t>.</a:t>
-            </a:r>
-            <a:endParaRPr lang="en-US" dirty="0"/>
-          </a:p>
-          <a:p>
-            <a:pPr marL="285750" indent="-285750">
-              <a:spcAft>
-                <a:spcPts val="600"/>
-              </a:spcAft>
+              <a:rPr lang="ru-RU" sz="2000" dirty="0"/>
+              <a:t>Реализовать алгоритм согласования заявок с жизненными циклами запроса на руководство и заявки на тему.</a:t>
+            </a:r>
+          </a:p>
+          <a:p>
+            <a:pPr marL="285750" lvl="0" indent="-285750">
               <a:buFont typeface="Arial" panose="020B0604020202020204" pitchFamily="34" charset="0"/>
               <a:buChar char="•"/>
             </a:pPr>
             <a:r>
-              <a:rPr lang="en-US" dirty="0">
-                <a:solidFill>
-                  <a:srgbClr val="000000"/>
-                </a:solidFill>
-                <a:ea typeface="Times New Roman" pitchFamily="34" charset="-122"/>
-                <a:cs typeface="Times New Roman" pitchFamily="34" charset="-120"/>
-              </a:rPr>
-              <a:t>Проектирование архитектуры по принципам Clean Architecture</a:t>
-            </a:r>
-            <a:r>
-              <a:rPr lang="ru-RU" dirty="0">
-                <a:solidFill>
-                  <a:srgbClr val="000000"/>
-                </a:solidFill>
-                <a:ea typeface="Times New Roman" pitchFamily="34" charset="-122"/>
-                <a:cs typeface="Times New Roman" pitchFamily="34" charset="-120"/>
-              </a:rPr>
-              <a:t>.</a:t>
-            </a:r>
-            <a:endParaRPr lang="en-US" dirty="0"/>
-          </a:p>
-          <a:p>
-            <a:pPr marL="285750" indent="-285750">
-              <a:spcAft>
-                <a:spcPts val="600"/>
-              </a:spcAft>
+              <a:rPr lang="ru-RU" sz="2000" dirty="0"/>
+              <a:t>Разработать модуль коммуникации, ролевую модель доступа и подсистему уведомлений.</a:t>
+            </a:r>
+          </a:p>
+          <a:p>
+            <a:pPr marL="285750" lvl="0" indent="-285750">
               <a:buFont typeface="Arial" panose="020B0604020202020204" pitchFamily="34" charset="0"/>
               <a:buChar char="•"/>
             </a:pPr>
             <a:r>
-              <a:rPr lang="en-US" dirty="0">
-                <a:solidFill>
-                  <a:srgbClr val="000000"/>
-                </a:solidFill>
-                <a:ea typeface="Times New Roman" pitchFamily="34" charset="-122"/>
-                <a:cs typeface="Times New Roman" pitchFamily="34" charset="-120"/>
-              </a:rPr>
-              <a:t>Разработка реляционной модели данных</a:t>
-            </a:r>
-            <a:r>
-              <a:rPr lang="ru-RU" dirty="0">
-                <a:solidFill>
-                  <a:srgbClr val="000000"/>
-                </a:solidFill>
-                <a:ea typeface="Times New Roman" pitchFamily="34" charset="-122"/>
-                <a:cs typeface="Times New Roman" pitchFamily="34" charset="-120"/>
-              </a:rPr>
-              <a:t>.</a:t>
-            </a:r>
-            <a:endParaRPr lang="en-US" dirty="0"/>
-          </a:p>
-          <a:p>
-            <a:pPr marL="285750" indent="-285750">
-              <a:spcAft>
-                <a:spcPts val="600"/>
-              </a:spcAft>
-              <a:buFont typeface="Arial" panose="020B0604020202020204" pitchFamily="34" charset="0"/>
-              <a:buChar char="•"/>
-            </a:pPr>
-            <a:r>
-              <a:rPr lang="en-US" dirty="0">
-                <a:solidFill>
-                  <a:srgbClr val="000000"/>
-                </a:solidFill>
-                <a:ea typeface="Times New Roman" pitchFamily="34" charset="-122"/>
-                <a:cs typeface="Times New Roman" pitchFamily="34" charset="-120"/>
-              </a:rPr>
-              <a:t>Реализация алгоритма согласования заявок (двухэтапный </a:t>
-            </a:r>
-            <a:r>
-              <a:rPr lang="ru-RU" dirty="0">
-                <a:solidFill>
-                  <a:srgbClr val="000000"/>
-                </a:solidFill>
-                <a:ea typeface="Times New Roman" pitchFamily="34" charset="-122"/>
-                <a:cs typeface="Times New Roman" pitchFamily="34" charset="-120"/>
-              </a:rPr>
-              <a:t>жизненный цикл(ЖЦ)</a:t>
-            </a:r>
-            <a:r>
-              <a:rPr lang="en-US" dirty="0">
-                <a:solidFill>
-                  <a:srgbClr val="000000"/>
-                </a:solidFill>
-                <a:ea typeface="Times New Roman" pitchFamily="34" charset="-122"/>
-                <a:cs typeface="Times New Roman" pitchFamily="34" charset="-120"/>
-              </a:rPr>
-              <a:t>)</a:t>
-            </a:r>
-            <a:r>
-              <a:rPr lang="ru-RU" dirty="0">
-                <a:solidFill>
-                  <a:srgbClr val="000000"/>
-                </a:solidFill>
-                <a:ea typeface="Times New Roman" pitchFamily="34" charset="-122"/>
-                <a:cs typeface="Times New Roman" pitchFamily="34" charset="-120"/>
-              </a:rPr>
-              <a:t>.</a:t>
-            </a:r>
-            <a:endParaRPr lang="en-US" dirty="0"/>
-          </a:p>
-          <a:p>
-            <a:pPr marL="285750" indent="-285750">
-              <a:spcAft>
-                <a:spcPts val="600"/>
-              </a:spcAft>
-              <a:buFont typeface="Arial" panose="020B0604020202020204" pitchFamily="34" charset="0"/>
-              <a:buChar char="•"/>
-            </a:pPr>
-            <a:r>
-              <a:rPr lang="en-US" dirty="0">
-                <a:solidFill>
-                  <a:srgbClr val="000000"/>
-                </a:solidFill>
-                <a:ea typeface="Times New Roman" pitchFamily="34" charset="-122"/>
-                <a:cs typeface="Times New Roman" pitchFamily="34" charset="-120"/>
-              </a:rPr>
-              <a:t>Разработка модуля коммуникации (чат в рамках заявки)</a:t>
-            </a:r>
-            <a:r>
-              <a:rPr lang="ru-RU" dirty="0">
-                <a:solidFill>
-                  <a:srgbClr val="000000"/>
-                </a:solidFill>
-                <a:ea typeface="Times New Roman" pitchFamily="34" charset="-122"/>
-                <a:cs typeface="Times New Roman" pitchFamily="34" charset="-120"/>
-              </a:rPr>
-              <a:t>.</a:t>
-            </a:r>
-            <a:endParaRPr lang="en-US" dirty="0"/>
-          </a:p>
-          <a:p>
-            <a:pPr marL="285750" indent="-285750">
-              <a:spcAft>
-                <a:spcPts val="600"/>
-              </a:spcAft>
-              <a:buFont typeface="Arial" panose="020B0604020202020204" pitchFamily="34" charset="0"/>
-              <a:buChar char="•"/>
-            </a:pPr>
-            <a:r>
-              <a:rPr lang="en-US" dirty="0">
-                <a:solidFill>
-                  <a:srgbClr val="000000"/>
-                </a:solidFill>
-                <a:ea typeface="Times New Roman" pitchFamily="34" charset="-122"/>
-                <a:cs typeface="Times New Roman" pitchFamily="34" charset="-120"/>
-              </a:rPr>
-              <a:t>Реализация ролевой модели доступа (студент, преподаватель, зав. кафедрой, администратор)</a:t>
-            </a:r>
-            <a:r>
-              <a:rPr lang="ru-RU" dirty="0">
-                <a:solidFill>
-                  <a:srgbClr val="000000"/>
-                </a:solidFill>
-                <a:ea typeface="Times New Roman" pitchFamily="34" charset="-122"/>
-                <a:cs typeface="Times New Roman" pitchFamily="34" charset="-120"/>
-              </a:rPr>
-              <a:t>.</a:t>
-            </a:r>
-            <a:endParaRPr lang="en-US" dirty="0"/>
-          </a:p>
-          <a:p>
-            <a:pPr marL="285750" indent="-285750">
-              <a:spcAft>
-                <a:spcPts val="600"/>
-              </a:spcAft>
-              <a:buFont typeface="Arial" panose="020B0604020202020204" pitchFamily="34" charset="0"/>
-              <a:buChar char="•"/>
-            </a:pPr>
-            <a:r>
-              <a:rPr lang="en-US" dirty="0">
-                <a:solidFill>
-                  <a:srgbClr val="000000"/>
-                </a:solidFill>
-                <a:ea typeface="Times New Roman" pitchFamily="34" charset="-122"/>
-                <a:cs typeface="Times New Roman" pitchFamily="34" charset="-120"/>
-              </a:rPr>
-              <a:t>Реализация подсистемы уведомлений с дублированием по e-mail</a:t>
-            </a:r>
-            <a:r>
-              <a:rPr lang="ru-RU" dirty="0">
-                <a:solidFill>
-                  <a:srgbClr val="000000"/>
-                </a:solidFill>
-                <a:ea typeface="Times New Roman" pitchFamily="34" charset="-122"/>
-                <a:cs typeface="Times New Roman" pitchFamily="34" charset="-120"/>
-              </a:rPr>
-              <a:t>.</a:t>
-            </a:r>
-            <a:endParaRPr lang="en-US" dirty="0"/>
-          </a:p>
-          <a:p>
-            <a:pPr marL="285750" indent="-285750">
-              <a:spcAft>
-                <a:spcPts val="600"/>
-              </a:spcAft>
-              <a:buFont typeface="Arial" panose="020B0604020202020204" pitchFamily="34" charset="0"/>
-              <a:buChar char="•"/>
-            </a:pPr>
-            <a:r>
-              <a:rPr lang="en-US" dirty="0">
-                <a:solidFill>
-                  <a:srgbClr val="000000"/>
-                </a:solidFill>
-                <a:ea typeface="Times New Roman" pitchFamily="34" charset="-122"/>
-                <a:cs typeface="Times New Roman" pitchFamily="34" charset="-120"/>
-              </a:rPr>
-              <a:t>Тестирование: бизнес-логика, разграничение прав, параллельные операции</a:t>
-            </a:r>
-            <a:r>
-              <a:rPr lang="ru-RU" dirty="0">
-                <a:solidFill>
-                  <a:srgbClr val="000000"/>
-                </a:solidFill>
-                <a:ea typeface="Times New Roman" pitchFamily="34" charset="-122"/>
-                <a:cs typeface="Times New Roman" pitchFamily="34" charset="-120"/>
-              </a:rPr>
-              <a:t>.</a:t>
-            </a:r>
-            <a:endParaRPr lang="en-US" dirty="0"/>
+              <a:rPr lang="ru-RU" sz="2000" dirty="0"/>
+              <a:t>Выполнить тестирование системы на корректность бизнес-логики, разграничение прав доступа и устойчивость при параллельных операциях.</a:t>
+            </a:r>
           </a:p>
         </p:txBody>
       </p:sp>
@@ -5679,8 +6097,8 @@
         </p:nvSpPr>
         <p:spPr>
           <a:xfrm>
-            <a:off x="8173329" y="108000"/>
-            <a:ext cx="790671" cy="288000"/>
+            <a:off x="8280000" y="4680000"/>
+            <a:ext cx="468000" cy="360000"/>
           </a:xfrm>
           <a:prstGeom prst="rect">
             <a:avLst/>
@@ -5696,20 +6114,13 @@
               <a:buNone/>
             </a:pPr>
             <a:r>
-              <a:rPr lang="ru-RU" sz="1600" dirty="0">
+              <a:rPr lang="ru-RU" sz="2000" dirty="0">
                 <a:ea typeface="Times New Roman" pitchFamily="34" charset="-122"/>
                 <a:cs typeface="Times New Roman" pitchFamily="34" charset="-120"/>
               </a:rPr>
               <a:t>3</a:t>
             </a:r>
-            <a:r>
-              <a:rPr lang="en-US" sz="1600" dirty="0">
-                <a:ea typeface="Times New Roman" pitchFamily="34" charset="-122"/>
-                <a:cs typeface="Times New Roman" pitchFamily="34" charset="-120"/>
-              </a:rPr>
-              <a:t> / 20</a:t>
-            </a:r>
-            <a:endParaRPr lang="en-US" sz="1600" dirty="0"/>
+            <a:endParaRPr lang="en-US" sz="2000" dirty="0"/>
           </a:p>
         </p:txBody>
       </p:sp>
@@ -5822,7 +6233,7 @@
               <a:buChar char="•"/>
             </a:pPr>
             <a:r>
-              <a:rPr lang="en-US" b="1" dirty="0">
+              <a:rPr lang="en-US" sz="2000" dirty="0">
                 <a:solidFill>
                   <a:srgbClr val="000000"/>
                 </a:solidFill>
@@ -5831,27 +6242,7 @@
               </a:rPr>
               <a:t>Отсутствие единого регламентированного процесса</a:t>
             </a:r>
-            <a:endParaRPr lang="ru-RU" b="1" dirty="0"/>
-          </a:p>
-          <a:p>
-            <a:pPr marL="742950" lvl="1" indent="-285750">
-              <a:spcAft>
-                <a:spcPts val="600"/>
-              </a:spcAft>
-              <a:buFont typeface="Arial" panose="020B0604020202020204" pitchFamily="34" charset="0"/>
-              <a:buChar char="•"/>
-            </a:pPr>
-            <a:r>
-              <a:rPr lang="en-US" dirty="0">
-                <a:solidFill>
-                  <a:srgbClr val="000000"/>
-                </a:solidFill>
-                <a:ea typeface="Times New Roman" pitchFamily="34" charset="-122"/>
-                <a:cs typeface="Times New Roman" pitchFamily="34" charset="-120"/>
-              </a:rPr>
-              <a:t>Нет явных статусов заявки и единой точки контроля для всех участников</a:t>
-            </a:r>
-            <a:endParaRPr lang="en-US" dirty="0"/>
+            <a:endParaRPr lang="ru-RU" sz="2000" dirty="0"/>
           </a:p>
           <a:p>
             <a:pPr marL="285750" indent="-285750">
@@ -5862,7 +6253,7 @@
               <a:buChar char="•"/>
             </a:pPr>
             <a:r>
-              <a:rPr lang="en-US" b="1" dirty="0">
+              <a:rPr lang="en-US" sz="2000" dirty="0">
                 <a:solidFill>
                   <a:srgbClr val="000000"/>
                 </a:solidFill>
@@ -5871,33 +6262,13 @@
               </a:rPr>
               <a:t>Ручной учёт и бумажный документооборот</a:t>
             </a:r>
-            <a:endParaRPr lang="ru-RU" b="1" dirty="0">
+            <a:endParaRPr lang="ru-RU" sz="2000" dirty="0">
               <a:solidFill>
                 <a:srgbClr val="000000"/>
               </a:solidFill>
               <a:ea typeface="Times New Roman" pitchFamily="34" charset="-122"/>
               <a:cs typeface="Times New Roman" pitchFamily="34" charset="-120"/>
             </a:endParaRPr>
-          </a:p>
-          <a:p>
-            <a:pPr marL="742950" lvl="1" indent="-285750">
-              <a:spcAft>
-                <a:spcPts val="600"/>
-              </a:spcAft>
-              <a:buFont typeface="Arial" panose="020B0604020202020204" pitchFamily="34" charset="0"/>
-              <a:buChar char="•"/>
-            </a:pPr>
-            <a:r>
-              <a:rPr lang="en-US" dirty="0">
-                <a:solidFill>
-                  <a:srgbClr val="000000"/>
-                </a:solidFill>
-                <a:ea typeface="Times New Roman" pitchFamily="34" charset="-122"/>
-                <a:cs typeface="Times New Roman" pitchFamily="34" charset="-120"/>
-              </a:rPr>
-              <a:t>Высок риск конфликтов при одновременном выборе одной темы разными студентами</a:t>
-            </a:r>
-            <a:endParaRPr lang="en-US" dirty="0"/>
           </a:p>
           <a:p>
             <a:pPr marL="285750" indent="-285750">
@@ -5908,7 +6279,7 @@
               <a:buChar char="•"/>
             </a:pPr>
             <a:r>
-              <a:rPr lang="en-US" b="1" dirty="0">
+              <a:rPr lang="en-US" sz="2000" dirty="0">
                 <a:solidFill>
                   <a:srgbClr val="000000"/>
                 </a:solidFill>
@@ -5917,27 +6288,7 @@
               </a:rPr>
               <a:t>Ограниченная коммуникация в рамках заявки</a:t>
             </a:r>
-            <a:endParaRPr lang="ru-RU" b="1" dirty="0"/>
-          </a:p>
-          <a:p>
-            <a:pPr marL="742950" lvl="1" indent="-285750">
-              <a:spcAft>
-                <a:spcPts val="600"/>
-              </a:spcAft>
-              <a:buFont typeface="Arial" panose="020B0604020202020204" pitchFamily="34" charset="0"/>
-              <a:buChar char="•"/>
-            </a:pPr>
-            <a:r>
-              <a:rPr lang="en-US" dirty="0">
-                <a:solidFill>
-                  <a:srgbClr val="000000"/>
-                </a:solidFill>
-                <a:ea typeface="Times New Roman" pitchFamily="34" charset="-122"/>
-                <a:cs typeface="Times New Roman" pitchFamily="34" charset="-120"/>
-              </a:rPr>
-              <a:t>Обсуждение ведётся в мессенджерах, история не привязана к заявке</a:t>
-            </a:r>
-            <a:endParaRPr lang="en-US" dirty="0"/>
+            <a:endParaRPr lang="ru-RU" sz="2000" dirty="0"/>
           </a:p>
           <a:p>
             <a:pPr marL="285750" indent="-285750">
@@ -5948,7 +6299,7 @@
               <a:buChar char="•"/>
             </a:pPr>
             <a:r>
-              <a:rPr lang="en-US" b="1" dirty="0">
+              <a:rPr lang="en-US" sz="2000" dirty="0">
                 <a:solidFill>
                   <a:srgbClr val="000000"/>
                 </a:solidFill>
@@ -5957,27 +6308,7 @@
               </a:rPr>
               <a:t>Многократное оформление бумажных заявлений</a:t>
             </a:r>
-            <a:endParaRPr lang="ru-RU" b="1" dirty="0"/>
-          </a:p>
-          <a:p>
-            <a:pPr marL="742950" lvl="1" indent="-285750">
-              <a:spcAft>
-                <a:spcPts val="600"/>
-              </a:spcAft>
-              <a:buFont typeface="Arial" panose="020B0604020202020204" pitchFamily="34" charset="0"/>
-              <a:buChar char="•"/>
-            </a:pPr>
-            <a:r>
-              <a:rPr lang="en-US" dirty="0">
-                <a:solidFill>
-                  <a:srgbClr val="000000"/>
-                </a:solidFill>
-                <a:ea typeface="Times New Roman" pitchFamily="34" charset="-122"/>
-                <a:cs typeface="Times New Roman" pitchFamily="34" charset="-120"/>
-              </a:rPr>
-              <a:t>Любой отказ требует повторного оформления</a:t>
-            </a:r>
-            <a:endParaRPr lang="en-US" dirty="0"/>
+            <a:endParaRPr lang="ru-RU" sz="2000" dirty="0"/>
           </a:p>
           <a:p>
             <a:pPr marL="285750" indent="-285750">
@@ -5988,7 +6319,7 @@
               <a:buChar char="•"/>
             </a:pPr>
             <a:r>
-              <a:rPr lang="en-US" b="1" dirty="0">
+              <a:rPr lang="en-US" sz="2000" dirty="0">
                 <a:solidFill>
                   <a:srgbClr val="000000"/>
                 </a:solidFill>
@@ -5997,27 +6328,7 @@
               </a:rPr>
               <a:t>Затруднённое формирование отчётности</a:t>
             </a:r>
-            <a:endParaRPr lang="ru-RU" b="1" dirty="0"/>
-          </a:p>
-          <a:p>
-            <a:pPr marL="742950" lvl="1" indent="-285750">
-              <a:spcAft>
-                <a:spcPts val="600"/>
-              </a:spcAft>
-              <a:buFont typeface="Arial" panose="020B0604020202020204" pitchFamily="34" charset="0"/>
-              <a:buChar char="•"/>
-            </a:pPr>
-            <a:r>
-              <a:rPr lang="en-US" dirty="0">
-                <a:solidFill>
-                  <a:srgbClr val="000000"/>
-                </a:solidFill>
-                <a:ea typeface="Times New Roman" pitchFamily="34" charset="-122"/>
-                <a:cs typeface="Times New Roman" pitchFamily="34" charset="-120"/>
-              </a:rPr>
-              <a:t>Данные разрозненны — сводная аналитика требует ручной агрегации</a:t>
-            </a:r>
-            <a:endParaRPr lang="en-US" dirty="0"/>
+            <a:endParaRPr lang="ru-RU" sz="2000" dirty="0"/>
           </a:p>
         </p:txBody>
       </p:sp>
@@ -6035,8 +6346,8 @@
         </p:nvSpPr>
         <p:spPr>
           <a:xfrm>
-            <a:off x="8173329" y="108000"/>
-            <a:ext cx="790671" cy="288000"/>
+            <a:off x="8280000" y="4680000"/>
+            <a:ext cx="468000" cy="360000"/>
           </a:xfrm>
           <a:prstGeom prst="rect">
             <a:avLst/>
@@ -6048,24 +6359,16 @@
           <a:bodyPr wrap="square" rtlCol="0" anchor="ctr"/>
           <a:lstStyle/>
           <a:p>
-            <a:pPr marL="0" indent="0" algn="r">
-              <a:buNone/>
-            </a:pPr>
-            <a:r>
-              <a:rPr lang="ru-RU" sz="1600" dirty="0">
-                <a:ea typeface="Times New Roman" pitchFamily="34" charset="-122"/>
+            <a:pPr algn="r"/>
+            <a:r>
+              <a:rPr lang="ru-RU" sz="2000" dirty="0">
                 <a:cs typeface="Times New Roman" pitchFamily="34" charset="-120"/>
               </a:rPr>
               <a:t>4</a:t>
             </a:r>
-            <a:r>
-              <a:rPr lang="en-US" sz="1600" dirty="0">
-                <a:ea typeface="Times New Roman" pitchFamily="34" charset="-122"/>
-                <a:cs typeface="Times New Roman" pitchFamily="34" charset="-120"/>
-              </a:rPr>
-              <a:t> / 20</a:t>
-            </a:r>
-            <a:endParaRPr lang="en-US" sz="1600" dirty="0"/>
+            <a:endParaRPr lang="en-US" sz="2000" dirty="0">
+              <a:cs typeface="Times New Roman" pitchFamily="34" charset="-120"/>
+            </a:endParaRPr>
           </a:p>
         </p:txBody>
       </p:sp>
@@ -9321,8 +9624,8 @@
         </p:nvSpPr>
         <p:spPr>
           <a:xfrm>
-            <a:off x="8173329" y="108000"/>
-            <a:ext cx="790671" cy="288000"/>
+            <a:off x="8280000" y="4680000"/>
+            <a:ext cx="468000" cy="360000"/>
           </a:xfrm>
           <a:prstGeom prst="rect">
             <a:avLst/>
@@ -9334,24 +9637,16 @@
           <a:bodyPr wrap="square" rtlCol="0" anchor="ctr"/>
           <a:lstStyle/>
           <a:p>
-            <a:pPr marL="0" indent="0" algn="r">
-              <a:buNone/>
-            </a:pPr>
-            <a:r>
-              <a:rPr lang="ru-RU" sz="1600" dirty="0">
-                <a:ea typeface="Times New Roman" pitchFamily="34" charset="-122"/>
+            <a:pPr algn="r"/>
+            <a:r>
+              <a:rPr lang="ru-RU" sz="2000" dirty="0">
                 <a:cs typeface="Times New Roman" pitchFamily="34" charset="-120"/>
               </a:rPr>
               <a:t>5</a:t>
             </a:r>
-            <a:r>
-              <a:rPr lang="en-US" sz="1600" dirty="0">
-                <a:ea typeface="Times New Roman" pitchFamily="34" charset="-122"/>
-                <a:cs typeface="Times New Roman" pitchFamily="34" charset="-120"/>
-              </a:rPr>
-              <a:t> / 20</a:t>
-            </a:r>
-            <a:endParaRPr lang="en-US" sz="1600" dirty="0"/>
+            <a:endParaRPr lang="en-US" sz="2000" dirty="0">
+              <a:cs typeface="Times New Roman" pitchFamily="34" charset="-120"/>
+            </a:endParaRPr>
           </a:p>
         </p:txBody>
       </p:sp>
@@ -9510,7 +9805,7 @@
               <a:buChar char="•"/>
             </a:pPr>
             <a:r>
-              <a:rPr lang="en-US" sz="1600" dirty="0">
+              <a:rPr lang="en-US" dirty="0">
                 <a:solidFill>
                   <a:srgbClr val="000000"/>
                 </a:solidFill>
@@ -9520,7 +9815,7 @@
               <a:t>4 роли: студент, преподаватель, зав. кафедрой, администратор</a:t>
             </a:r>
             <a:r>
-              <a:rPr lang="ru-RU" sz="1600" dirty="0">
+              <a:rPr lang="ru-RU" dirty="0">
                 <a:solidFill>
                   <a:srgbClr val="000000"/>
                 </a:solidFill>
@@ -9529,7 +9824,7 @@
               </a:rPr>
               <a:t>.</a:t>
             </a:r>
-            <a:endParaRPr lang="en-US" sz="1600" dirty="0"/>
+            <a:endParaRPr lang="en-US" dirty="0"/>
           </a:p>
           <a:p>
             <a:pPr marL="285750" indent="-285750">
@@ -9540,7 +9835,7 @@
               <a:buChar char="•"/>
             </a:pPr>
             <a:r>
-              <a:rPr lang="en-US" sz="1600" dirty="0">
+              <a:rPr lang="en-US" dirty="0">
                 <a:solidFill>
                   <a:srgbClr val="000000"/>
                 </a:solidFill>
@@ -9550,7 +9845,7 @@
               <a:t>Каталог преподавателей с лимитом и фильтрацией тем ВКР</a:t>
             </a:r>
             <a:r>
-              <a:rPr lang="ru-RU" sz="1600" dirty="0">
+              <a:rPr lang="ru-RU" dirty="0">
                 <a:solidFill>
                   <a:srgbClr val="000000"/>
                 </a:solidFill>
@@ -9559,7 +9854,7 @@
               </a:rPr>
               <a:t>.</a:t>
             </a:r>
-            <a:endParaRPr lang="en-US" sz="1600" dirty="0"/>
+            <a:endParaRPr lang="en-US" dirty="0"/>
           </a:p>
           <a:p>
             <a:pPr marL="285750" indent="-285750">
@@ -9570,7 +9865,7 @@
               <a:buChar char="•"/>
             </a:pPr>
             <a:r>
-              <a:rPr lang="ru-RU" sz="1600" dirty="0">
+              <a:rPr lang="ru-RU" dirty="0">
                 <a:solidFill>
                   <a:srgbClr val="000000"/>
                 </a:solidFill>
@@ -9580,17 +9875,17 @@
               <a:t>ЖЦ</a:t>
             </a:r>
             <a:r>
-              <a:rPr lang="en-US" sz="1600" dirty="0">
+              <a:rPr lang="en-US" dirty="0">
                 <a:solidFill>
                   <a:srgbClr val="000000"/>
                 </a:solidFill>
                 <a:ea typeface="Times New Roman" pitchFamily="34" charset="-122"/>
                 <a:cs typeface="Times New Roman" pitchFamily="34" charset="-120"/>
               </a:rPr>
-              <a:t> запроса на руководство (4 статуса)</a:t>
-            </a:r>
-            <a:r>
-              <a:rPr lang="ru-RU" sz="1600" dirty="0">
+              <a:t> запроса на руководство</a:t>
+            </a:r>
+            <a:r>
+              <a:rPr lang="ru-RU" dirty="0">
                 <a:solidFill>
                   <a:srgbClr val="000000"/>
                 </a:solidFill>
@@ -9599,7 +9894,7 @@
               </a:rPr>
               <a:t>.</a:t>
             </a:r>
-            <a:endParaRPr lang="en-US" sz="1600" dirty="0"/>
+            <a:endParaRPr lang="en-US" dirty="0"/>
           </a:p>
           <a:p>
             <a:pPr marL="285750" indent="-285750">
@@ -9610,17 +9905,17 @@
               <a:buChar char="•"/>
             </a:pPr>
             <a:r>
-              <a:rPr lang="en-US" sz="1600" dirty="0">
+              <a:rPr lang="en-US" dirty="0">
                 <a:solidFill>
                   <a:srgbClr val="000000"/>
                 </a:solidFill>
                 <a:ea typeface="Times New Roman" pitchFamily="34" charset="-122"/>
                 <a:cs typeface="Times New Roman" pitchFamily="34" charset="-120"/>
               </a:rPr>
-              <a:t>ЖЦ заявки на тему ВКР (6 статусов + журнал)</a:t>
-            </a:r>
-            <a:r>
-              <a:rPr lang="ru-RU" sz="1600" dirty="0">
+              <a:t>ЖЦ заявки на тему ВКР</a:t>
+            </a:r>
+            <a:r>
+              <a:rPr lang="ru-RU" dirty="0">
                 <a:solidFill>
                   <a:srgbClr val="000000"/>
                 </a:solidFill>
@@ -9629,7 +9924,7 @@
               </a:rPr>
               <a:t>.</a:t>
             </a:r>
-            <a:endParaRPr lang="en-US" sz="1600" dirty="0"/>
+            <a:endParaRPr lang="en-US" dirty="0"/>
           </a:p>
           <a:p>
             <a:pPr marL="285750" indent="-285750">
@@ -9640,17 +9935,17 @@
               <a:buChar char="•"/>
             </a:pPr>
             <a:r>
-              <a:rPr lang="en-US" sz="1600" dirty="0">
+              <a:rPr lang="en-US" dirty="0">
                 <a:solidFill>
                   <a:srgbClr val="000000"/>
                 </a:solidFill>
                 <a:ea typeface="Times New Roman" pitchFamily="34" charset="-122"/>
                 <a:cs typeface="Times New Roman" pitchFamily="34" charset="-120"/>
               </a:rPr>
-              <a:t>Чат в рамках заявки (студент ↔ преподаватель)</a:t>
-            </a:r>
-            <a:r>
-              <a:rPr lang="ru-RU" sz="1600" dirty="0">
+              <a:t>Чат в рамках заявки</a:t>
+            </a:r>
+            <a:r>
+              <a:rPr lang="ru-RU" dirty="0">
                 <a:solidFill>
                   <a:srgbClr val="000000"/>
                 </a:solidFill>
@@ -9659,7 +9954,7 @@
               </a:rPr>
               <a:t>.</a:t>
             </a:r>
-            <a:endParaRPr lang="en-US" sz="1600" dirty="0"/>
+            <a:endParaRPr lang="en-US" dirty="0"/>
           </a:p>
           <a:p>
             <a:pPr marL="285750" indent="-285750">
@@ -9670,36 +9965,26 @@
               <a:buChar char="•"/>
             </a:pPr>
             <a:r>
-              <a:rPr lang="en-US" sz="1600" dirty="0">
+              <a:rPr lang="en-US" dirty="0">
                 <a:solidFill>
                   <a:srgbClr val="000000"/>
                 </a:solidFill>
                 <a:ea typeface="Times New Roman" pitchFamily="34" charset="-122"/>
                 <a:cs typeface="Times New Roman" pitchFamily="34" charset="-120"/>
               </a:rPr>
-              <a:t>Архив ВКР с загрузкой и presigned-</a:t>
-            </a:r>
-            <a:r>
-              <a:rPr lang="en-US" sz="1600" dirty="0" err="1">
+              <a:t>Архив ВКР</a:t>
+            </a:r>
+            <a:r>
+              <a:rPr lang="ru-RU" dirty="0">
                 <a:solidFill>
                   <a:srgbClr val="000000"/>
                 </a:solidFill>
                 <a:ea typeface="Times New Roman" pitchFamily="34" charset="-122"/>
                 <a:cs typeface="Times New Roman" pitchFamily="34" charset="-120"/>
               </a:rPr>
-              <a:t>ссылками</a:t>
-            </a:r>
-            <a:r>
-              <a:rPr lang="ru-RU" sz="1600" dirty="0">
-                <a:solidFill>
-                  <a:srgbClr val="000000"/>
-                </a:solidFill>
-                <a:ea typeface="Times New Roman" pitchFamily="34" charset="-122"/>
-                <a:cs typeface="Times New Roman" pitchFamily="34" charset="-120"/>
-              </a:rPr>
               <a:t>.</a:t>
             </a:r>
-            <a:endParaRPr lang="en-US" sz="1600" dirty="0"/>
+            <a:endParaRPr lang="en-US" dirty="0"/>
           </a:p>
           <a:p>
             <a:pPr marL="285750" indent="-285750">
@@ -9710,17 +9995,17 @@
               <a:buChar char="•"/>
             </a:pPr>
             <a:r>
-              <a:rPr lang="en-US" sz="1600" dirty="0">
+              <a:rPr lang="en-US" dirty="0">
                 <a:solidFill>
                   <a:srgbClr val="000000"/>
                 </a:solidFill>
                 <a:ea typeface="Times New Roman" pitchFamily="34" charset="-122"/>
                 <a:cs typeface="Times New Roman" pitchFamily="34" charset="-120"/>
               </a:rPr>
-              <a:t>Уведомления: in-app + email</a:t>
-            </a:r>
-            <a:r>
-              <a:rPr lang="ru-RU" sz="1600" dirty="0">
+              <a:t>Уведомления</a:t>
+            </a:r>
+            <a:r>
+              <a:rPr lang="ru-RU" dirty="0">
                 <a:solidFill>
                   <a:srgbClr val="000000"/>
                 </a:solidFill>
@@ -9729,7 +10014,7 @@
               </a:rPr>
               <a:t>.</a:t>
             </a:r>
-            <a:endParaRPr lang="en-US" sz="1600" dirty="0"/>
+            <a:endParaRPr lang="en-US" dirty="0"/>
           </a:p>
           <a:p>
             <a:pPr marL="285750" indent="-285750">
@@ -9740,17 +10025,17 @@
               <a:buChar char="•"/>
             </a:pPr>
             <a:r>
-              <a:rPr lang="en-US" sz="1600" dirty="0">
+              <a:rPr lang="en-US" dirty="0">
                 <a:solidFill>
                   <a:srgbClr val="000000"/>
                 </a:solidFill>
                 <a:ea typeface="Times New Roman" pitchFamily="34" charset="-122"/>
                 <a:cs typeface="Times New Roman" pitchFamily="34" charset="-120"/>
               </a:rPr>
-              <a:t>Аналитика и экспорт (Excel / CSV)</a:t>
-            </a:r>
-            <a:r>
-              <a:rPr lang="ru-RU" sz="1600" dirty="0">
+              <a:t>Аналитика и экспорт</a:t>
+            </a:r>
+            <a:r>
+              <a:rPr lang="ru-RU" dirty="0">
                 <a:solidFill>
                   <a:srgbClr val="000000"/>
                 </a:solidFill>
@@ -9759,7 +10044,7 @@
               </a:rPr>
               <a:t>.</a:t>
             </a:r>
-            <a:endParaRPr lang="en-US" sz="1600" dirty="0"/>
+            <a:endParaRPr lang="en-US" dirty="0"/>
           </a:p>
         </p:txBody>
       </p:sp>
@@ -9840,7 +10125,7 @@
               <a:buChar char="•"/>
             </a:pPr>
             <a:r>
-              <a:rPr lang="en-US" sz="1600" dirty="0">
+              <a:rPr lang="en-US" dirty="0">
                 <a:solidFill>
                   <a:srgbClr val="000000"/>
                 </a:solidFill>
@@ -9850,7 +10135,7 @@
               <a:t>Безопасность: JWT + refresh-ротация, bcrypt, rate-limit</a:t>
             </a:r>
             <a:r>
-              <a:rPr lang="ru-RU" sz="1600" dirty="0">
+              <a:rPr lang="ru-RU" dirty="0">
                 <a:solidFill>
                   <a:srgbClr val="000000"/>
                 </a:solidFill>
@@ -9859,7 +10144,7 @@
               </a:rPr>
               <a:t>.</a:t>
             </a:r>
-            <a:endParaRPr lang="en-US" sz="1600" dirty="0"/>
+            <a:endParaRPr lang="en-US" dirty="0"/>
           </a:p>
           <a:p>
             <a:pPr marL="285750" indent="-285750">
@@ -9870,7 +10155,7 @@
               <a:buChar char="•"/>
             </a:pPr>
             <a:r>
-              <a:rPr lang="en-US" sz="1600" dirty="0">
+              <a:rPr lang="en-US" dirty="0">
                 <a:solidFill>
                   <a:srgbClr val="000000"/>
                 </a:solidFill>
@@ -9880,7 +10165,7 @@
               <a:t>Масштабируемость: stateless-серверная часть</a:t>
             </a:r>
             <a:r>
-              <a:rPr lang="ru-RU" sz="1600" dirty="0">
+              <a:rPr lang="ru-RU" dirty="0">
                 <a:solidFill>
                   <a:srgbClr val="000000"/>
                 </a:solidFill>
@@ -9889,7 +10174,7 @@
               </a:rPr>
               <a:t>.</a:t>
             </a:r>
-            <a:endParaRPr lang="en-US" sz="1600" dirty="0"/>
+            <a:endParaRPr lang="en-US" dirty="0"/>
           </a:p>
           <a:p>
             <a:pPr marL="285750" indent="-285750">
@@ -9900,7 +10185,7 @@
               <a:buChar char="•"/>
             </a:pPr>
             <a:r>
-              <a:rPr lang="en-US" sz="1600" dirty="0">
+              <a:rPr lang="en-US" dirty="0">
                 <a:solidFill>
                   <a:srgbClr val="000000"/>
                 </a:solidFill>
@@ -9910,7 +10195,7 @@
               <a:t>Сопровождаемость: Clean Architecture, тесты</a:t>
             </a:r>
             <a:r>
-              <a:rPr lang="ru-RU" sz="1600" dirty="0">
+              <a:rPr lang="ru-RU" dirty="0">
                 <a:solidFill>
                   <a:srgbClr val="000000"/>
                 </a:solidFill>
@@ -9919,7 +10204,7 @@
               </a:rPr>
               <a:t>.</a:t>
             </a:r>
-            <a:endParaRPr lang="en-US" sz="1600" dirty="0"/>
+            <a:endParaRPr lang="en-US" dirty="0"/>
           </a:p>
           <a:p>
             <a:pPr marL="285750" indent="-285750">
@@ -9930,7 +10215,7 @@
               <a:buChar char="•"/>
             </a:pPr>
             <a:r>
-              <a:rPr lang="en-US" sz="1600" dirty="0">
+              <a:rPr lang="en-US" dirty="0">
                 <a:solidFill>
                   <a:srgbClr val="000000"/>
                 </a:solidFill>
@@ -9940,7 +10225,7 @@
               <a:t>Переносимость: Docker-контейнеры</a:t>
             </a:r>
             <a:r>
-              <a:rPr lang="ru-RU" sz="1600" dirty="0">
+              <a:rPr lang="ru-RU" dirty="0">
                 <a:solidFill>
                   <a:srgbClr val="000000"/>
                 </a:solidFill>
@@ -9949,7 +10234,7 @@
               </a:rPr>
               <a:t>.</a:t>
             </a:r>
-            <a:endParaRPr lang="en-US" sz="1600" dirty="0"/>
+            <a:endParaRPr lang="en-US" dirty="0"/>
           </a:p>
           <a:p>
             <a:pPr marL="285750" indent="-285750">
@@ -9960,7 +10245,7 @@
               <a:buChar char="•"/>
             </a:pPr>
             <a:r>
-              <a:rPr lang="en-US" sz="1600" dirty="0">
+              <a:rPr lang="en-US" dirty="0">
                 <a:solidFill>
                   <a:srgbClr val="000000"/>
                 </a:solidFill>
@@ -9970,7 +10255,7 @@
               <a:t>Доступность: адаптивный UI, актуальные браузеры</a:t>
             </a:r>
             <a:r>
-              <a:rPr lang="ru-RU" sz="1600" dirty="0">
+              <a:rPr lang="ru-RU" dirty="0">
                 <a:solidFill>
                   <a:srgbClr val="000000"/>
                 </a:solidFill>
@@ -9979,7 +10264,7 @@
               </a:rPr>
               <a:t>.</a:t>
             </a:r>
-            <a:endParaRPr lang="en-US" sz="1600" dirty="0"/>
+            <a:endParaRPr lang="en-US" dirty="0"/>
           </a:p>
         </p:txBody>
       </p:sp>
@@ -9997,8 +10282,8 @@
         </p:nvSpPr>
         <p:spPr>
           <a:xfrm>
-            <a:off x="8173329" y="108000"/>
-            <a:ext cx="790671" cy="288000"/>
+            <a:off x="8280000" y="4680000"/>
+            <a:ext cx="468000" cy="360000"/>
           </a:xfrm>
           <a:prstGeom prst="rect">
             <a:avLst/>
@@ -10010,24 +10295,16 @@
           <a:bodyPr wrap="square" rtlCol="0" anchor="ctr"/>
           <a:lstStyle/>
           <a:p>
-            <a:pPr marL="0" indent="0" algn="r">
-              <a:buNone/>
-            </a:pPr>
-            <a:r>
-              <a:rPr lang="ru-RU" sz="1600" dirty="0">
-                <a:ea typeface="Times New Roman" pitchFamily="34" charset="-122"/>
+            <a:pPr algn="r"/>
+            <a:r>
+              <a:rPr lang="ru-RU" sz="2000" dirty="0">
                 <a:cs typeface="Times New Roman" pitchFamily="34" charset="-120"/>
               </a:rPr>
               <a:t>6</a:t>
             </a:r>
-            <a:r>
-              <a:rPr lang="en-US" sz="1600" dirty="0">
-                <a:ea typeface="Times New Roman" pitchFamily="34" charset="-122"/>
-                <a:cs typeface="Times New Roman" pitchFamily="34" charset="-120"/>
-              </a:rPr>
-              <a:t> / 20</a:t>
-            </a:r>
-            <a:endParaRPr lang="en-US" sz="1600" dirty="0"/>
+            <a:endParaRPr lang="en-US" sz="2000" dirty="0">
+              <a:cs typeface="Times New Roman" pitchFamily="34" charset="-120"/>
+            </a:endParaRPr>
           </a:p>
         </p:txBody>
       </p:sp>
@@ -10744,8 +11021,8 @@
         </p:nvSpPr>
         <p:spPr>
           <a:xfrm>
-            <a:off x="8173329" y="108000"/>
-            <a:ext cx="790671" cy="288000"/>
+            <a:off x="8280000" y="4680000"/>
+            <a:ext cx="468000" cy="360000"/>
           </a:xfrm>
           <a:prstGeom prst="rect">
             <a:avLst/>
@@ -10757,24 +11034,16 @@
           <a:bodyPr wrap="square" rtlCol="0" anchor="ctr"/>
           <a:lstStyle/>
           <a:p>
-            <a:pPr marL="0" indent="0" algn="r">
-              <a:buNone/>
-            </a:pPr>
-            <a:r>
-              <a:rPr lang="ru-RU" sz="1600" dirty="0">
-                <a:ea typeface="Times New Roman" pitchFamily="34" charset="-122"/>
+            <a:pPr algn="r"/>
+            <a:r>
+              <a:rPr lang="ru-RU" sz="2000" dirty="0">
                 <a:cs typeface="Times New Roman" pitchFamily="34" charset="-120"/>
               </a:rPr>
               <a:t>7</a:t>
             </a:r>
-            <a:r>
-              <a:rPr lang="en-US" sz="1600" dirty="0">
-                <a:ea typeface="Times New Roman" pitchFamily="34" charset="-122"/>
-                <a:cs typeface="Times New Roman" pitchFamily="34" charset="-120"/>
-              </a:rPr>
-              <a:t> / 20</a:t>
-            </a:r>
-            <a:endParaRPr lang="en-US" sz="1600" dirty="0"/>
+            <a:endParaRPr lang="en-US" sz="2000" dirty="0">
+              <a:cs typeface="Times New Roman" pitchFamily="34" charset="-120"/>
+            </a:endParaRPr>
           </a:p>
         </p:txBody>
       </p:sp>
@@ -11056,8 +11325,8 @@
         </p:nvSpPr>
         <p:spPr>
           <a:xfrm>
-            <a:off x="8173329" y="108000"/>
-            <a:ext cx="790671" cy="288000"/>
+            <a:off x="8280000" y="4680000"/>
+            <a:ext cx="468000" cy="360000"/>
           </a:xfrm>
           <a:prstGeom prst="rect">
             <a:avLst/>
@@ -11069,24 +11338,16 @@
           <a:bodyPr wrap="square" rtlCol="0" anchor="ctr"/>
           <a:lstStyle/>
           <a:p>
-            <a:pPr marL="0" indent="0" algn="r">
-              <a:buNone/>
-            </a:pPr>
-            <a:r>
-              <a:rPr lang="ru-RU" sz="1600" dirty="0">
-                <a:ea typeface="Times New Roman" pitchFamily="34" charset="-122"/>
+            <a:pPr algn="r"/>
+            <a:r>
+              <a:rPr lang="ru-RU" sz="2000" dirty="0">
                 <a:cs typeface="Times New Roman" pitchFamily="34" charset="-120"/>
               </a:rPr>
               <a:t>8</a:t>
             </a:r>
-            <a:r>
-              <a:rPr lang="en-US" sz="1600" dirty="0">
-                <a:ea typeface="Times New Roman" pitchFamily="34" charset="-122"/>
-                <a:cs typeface="Times New Roman" pitchFamily="34" charset="-120"/>
-              </a:rPr>
-              <a:t> / 20</a:t>
-            </a:r>
-            <a:endParaRPr lang="en-US" sz="1600" dirty="0"/>
+            <a:endParaRPr lang="en-US" sz="2000" dirty="0">
+              <a:cs typeface="Times New Roman" pitchFamily="34" charset="-120"/>
+            </a:endParaRPr>
           </a:p>
         </p:txBody>
       </p:sp>
@@ -11113,7 +11374,7 @@
         <p:spPr>
           <a:xfrm>
             <a:off x="1463538" y="581290"/>
-            <a:ext cx="6216923" cy="4306473"/>
+            <a:ext cx="6216923" cy="4306472"/>
           </a:xfrm>
           <a:prstGeom prst="rect">
             <a:avLst/>
@@ -11214,8 +11475,8 @@
         </p:nvSpPr>
         <p:spPr>
           <a:xfrm>
-            <a:off x="8173329" y="108000"/>
-            <a:ext cx="790671" cy="288000"/>
+            <a:off x="8280000" y="4680000"/>
+            <a:ext cx="468000" cy="360000"/>
           </a:xfrm>
           <a:prstGeom prst="rect">
             <a:avLst/>
@@ -11227,24 +11488,16 @@
           <a:bodyPr wrap="square" rtlCol="0" anchor="ctr"/>
           <a:lstStyle/>
           <a:p>
-            <a:pPr marL="0" indent="0" algn="r">
-              <a:buNone/>
-            </a:pPr>
-            <a:r>
-              <a:rPr lang="ru-RU" sz="1600" dirty="0">
-                <a:ea typeface="Times New Roman" pitchFamily="34" charset="-122"/>
+            <a:pPr algn="r"/>
+            <a:r>
+              <a:rPr lang="ru-RU" sz="2000" dirty="0">
                 <a:cs typeface="Times New Roman" pitchFamily="34" charset="-120"/>
               </a:rPr>
               <a:t>9</a:t>
             </a:r>
-            <a:r>
-              <a:rPr lang="en-US" sz="1600" dirty="0">
-                <a:ea typeface="Times New Roman" pitchFamily="34" charset="-122"/>
-                <a:cs typeface="Times New Roman" pitchFamily="34" charset="-120"/>
-              </a:rPr>
-              <a:t> / 20</a:t>
-            </a:r>
-            <a:endParaRPr lang="en-US" sz="1600" dirty="0"/>
+            <a:endParaRPr lang="en-US" sz="2000" dirty="0">
+              <a:cs typeface="Times New Roman" pitchFamily="34" charset="-120"/>
+            </a:endParaRPr>
           </a:p>
         </p:txBody>
       </p:sp>
@@ -11270,8 +11523,8 @@
         </p:blipFill>
         <p:spPr>
           <a:xfrm>
-            <a:off x="182381" y="632150"/>
-            <a:ext cx="8779237" cy="4403350"/>
+            <a:off x="908868" y="632150"/>
+            <a:ext cx="7326263" cy="4403350"/>
           </a:xfrm>
           <a:prstGeom prst="rect">
             <a:avLst/>
